--- a/The-First-Six-Overs.pptx
+++ b/The-First-Six-Overs.pptx
@@ -5313,14 +5313,7 @@
           </a:bodyPr>
           <a:lstStyle/>
           <a:p>
-            <a:pPr algn="l">
-              <a:spcBef>
-                <a:spcPts val="0"/>
-              </a:spcBef>
-              <a:spcAft>
-                <a:spcPts val="0"/>
-              </a:spcAft>
-            </a:pPr>
+            <a:pPr algn="l"/>
             <a:r>
               <a:rPr sz="850" b="0" i="0" spc="150">
                 <a:solidFill>
@@ -5355,14 +5348,7 @@
           </a:bodyPr>
           <a:lstStyle/>
           <a:p>
-            <a:pPr algn="r">
-              <a:spcBef>
-                <a:spcPts val="0"/>
-              </a:spcBef>
-              <a:spcAft>
-                <a:spcPts val="0"/>
-              </a:spcAft>
-            </a:pPr>
+            <a:pPr algn="r"/>
             <a:r>
               <a:rPr sz="850" b="0" i="0" spc="150">
                 <a:solidFill>
@@ -5401,12 +5387,6 @@
               <a:lnSpc>
                 <a:spcPct val="96000"/>
               </a:lnSpc>
-              <a:spcBef>
-                <a:spcPts val="0"/>
-              </a:spcBef>
-              <a:spcAft>
-                <a:spcPts val="0"/>
-              </a:spcAft>
             </a:pPr>
             <a:r>
               <a:rPr sz="5800" b="0" i="0" spc="-120">
@@ -5508,12 +5488,6 @@
               <a:lnSpc>
                 <a:spcPct val="144000"/>
               </a:lnSpc>
-              <a:spcBef>
-                <a:spcPts val="0"/>
-              </a:spcBef>
-              <a:spcAft>
-                <a:spcPts val="0"/>
-              </a:spcAft>
             </a:pPr>
             <a:r>
               <a:rPr sz="1450" b="0" i="0">
@@ -5621,14 +5595,7 @@
           </a:bodyPr>
           <a:lstStyle/>
           <a:p>
-            <a:pPr algn="l">
-              <a:spcBef>
-                <a:spcPts val="0"/>
-              </a:spcBef>
-              <a:spcAft>
-                <a:spcPts val="0"/>
-              </a:spcAft>
-            </a:pPr>
+            <a:pPr algn="l"/>
             <a:r>
               <a:rPr sz="850" b="0" i="0" spc="140">
                 <a:solidFill>
@@ -5728,14 +5695,7 @@
           </a:bodyPr>
           <a:lstStyle/>
           <a:p>
-            <a:pPr algn="l">
-              <a:spcBef>
-                <a:spcPts val="0"/>
-              </a:spcBef>
-              <a:spcAft>
-                <a:spcPts val="0"/>
-              </a:spcAft>
-            </a:pPr>
+            <a:pPr algn="l"/>
             <a:r>
               <a:rPr sz="850" b="0" i="0" spc="150">
                 <a:solidFill>
@@ -5770,14 +5730,7 @@
           </a:bodyPr>
           <a:lstStyle/>
           <a:p>
-            <a:pPr algn="r">
-              <a:spcBef>
-                <a:spcPts val="0"/>
-              </a:spcBef>
-              <a:spcAft>
-                <a:spcPts val="0"/>
-              </a:spcAft>
-            </a:pPr>
+            <a:pPr algn="r"/>
             <a:r>
               <a:rPr sz="850" b="0" i="0" spc="150">
                 <a:solidFill>
@@ -5816,12 +5769,6 @@
               <a:lnSpc>
                 <a:spcPct val="102000"/>
               </a:lnSpc>
-              <a:spcBef>
-                <a:spcPts val="0"/>
-              </a:spcBef>
-              <a:spcAft>
-                <a:spcPts val="0"/>
-              </a:spcAft>
             </a:pPr>
             <a:r>
               <a:rPr sz="2600" b="0" i="0" spc="-30">
@@ -5861,12 +5808,6 @@
               <a:lnSpc>
                 <a:spcPct val="142000"/>
               </a:lnSpc>
-              <a:spcBef>
-                <a:spcPts val="0"/>
-              </a:spcBef>
-              <a:spcAft>
-                <a:spcPts val="0"/>
-              </a:spcAft>
             </a:pPr>
             <a:r>
               <a:rPr sz="1150" b="0" i="0">
@@ -5906,12 +5847,6 @@
               <a:lnSpc>
                 <a:spcPct val="136000"/>
               </a:lnSpc>
-              <a:spcBef>
-                <a:spcPts val="0"/>
-              </a:spcBef>
-              <a:spcAft>
-                <a:spcPts val="0"/>
-              </a:spcAft>
             </a:pPr>
             <a:r>
               <a:rPr sz="850" b="0" i="0" spc="140">
@@ -5986,28 +5921,21 @@
         </p:nvSpPr>
         <p:spPr>
           <a:xfrm>
-            <a:off x="5760720" y="1700784"/>
-            <a:ext cx="1649882" cy="457200"/>
-          </a:xfrm>
-          <a:prstGeom prst="rect">
-            <a:avLst/>
-          </a:prstGeom>
-          <a:noFill/>
-        </p:spPr>
-        <p:txBody>
-          <a:bodyPr wrap="square" anchor="t" lIns="0" rIns="0" tIns="0" bIns="0">
-            <a:noAutofit/>
-          </a:bodyPr>
-          <a:lstStyle/>
-          <a:p>
-            <a:pPr algn="l">
-              <a:spcBef>
-                <a:spcPts val="0"/>
-              </a:spcBef>
-              <a:spcAft>
-                <a:spcPts val="0"/>
-              </a:spcAft>
-            </a:pPr>
+            <a:off x="5760720" y="1682495"/>
+            <a:ext cx="1649882" cy="502920"/>
+          </a:xfrm>
+          <a:prstGeom prst="rect">
+            <a:avLst/>
+          </a:prstGeom>
+          <a:noFill/>
+        </p:spPr>
+        <p:txBody>
+          <a:bodyPr wrap="square" anchor="t" lIns="0" rIns="0" tIns="0" bIns="0">
+            <a:noAutofit/>
+          </a:bodyPr>
+          <a:lstStyle/>
+          <a:p>
+            <a:pPr algn="l"/>
             <a:r>
               <a:rPr sz="2600" b="0" i="0" spc="-60">
                 <a:solidFill>
@@ -6028,7 +5956,7 @@
         </p:nvSpPr>
         <p:spPr>
           <a:xfrm>
-            <a:off x="5760720" y="2212848"/>
+            <a:off x="5760720" y="2194560"/>
             <a:ext cx="1649882" cy="274320"/>
           </a:xfrm>
           <a:prstGeom prst="rect">
@@ -6042,14 +5970,7 @@
           </a:bodyPr>
           <a:lstStyle/>
           <a:p>
-            <a:pPr algn="l">
-              <a:spcBef>
-                <a:spcPts val="0"/>
-              </a:spcBef>
-              <a:spcAft>
-                <a:spcPts val="0"/>
-              </a:spcAft>
-            </a:pPr>
+            <a:pPr algn="l"/>
             <a:r>
               <a:rPr sz="1050" b="0" i="0">
                 <a:solidFill>
@@ -6070,7 +5991,7 @@
         </p:nvSpPr>
         <p:spPr>
           <a:xfrm>
-            <a:off x="5760720" y="2487168"/>
+            <a:off x="5760720" y="2468880"/>
             <a:ext cx="1649882" cy="274320"/>
           </a:xfrm>
           <a:prstGeom prst="rect">
@@ -6084,14 +6005,7 @@
           </a:bodyPr>
           <a:lstStyle/>
           <a:p>
-            <a:pPr algn="l">
-              <a:spcBef>
-                <a:spcPts val="0"/>
-              </a:spcBef>
-              <a:spcAft>
-                <a:spcPts val="0"/>
-              </a:spcAft>
-            </a:pPr>
+            <a:pPr algn="l"/>
             <a:r>
               <a:rPr sz="750" b="0" i="0" spc="120">
                 <a:solidFill>
@@ -6156,28 +6070,21 @@
         </p:nvSpPr>
         <p:spPr>
           <a:xfrm>
-            <a:off x="7684922" y="1700784"/>
-            <a:ext cx="1649882" cy="457200"/>
-          </a:xfrm>
-          <a:prstGeom prst="rect">
-            <a:avLst/>
-          </a:prstGeom>
-          <a:noFill/>
-        </p:spPr>
-        <p:txBody>
-          <a:bodyPr wrap="square" anchor="t" lIns="0" rIns="0" tIns="0" bIns="0">
-            <a:noAutofit/>
-          </a:bodyPr>
-          <a:lstStyle/>
-          <a:p>
-            <a:pPr algn="l">
-              <a:spcBef>
-                <a:spcPts val="0"/>
-              </a:spcBef>
-              <a:spcAft>
-                <a:spcPts val="0"/>
-              </a:spcAft>
-            </a:pPr>
+            <a:off x="7684922" y="1682495"/>
+            <a:ext cx="1649882" cy="502920"/>
+          </a:xfrm>
+          <a:prstGeom prst="rect">
+            <a:avLst/>
+          </a:prstGeom>
+          <a:noFill/>
+        </p:spPr>
+        <p:txBody>
+          <a:bodyPr wrap="square" anchor="t" lIns="0" rIns="0" tIns="0" bIns="0">
+            <a:noAutofit/>
+          </a:bodyPr>
+          <a:lstStyle/>
+          <a:p>
+            <a:pPr algn="l"/>
             <a:r>
               <a:rPr sz="2600" b="0" i="0" spc="-60">
                 <a:solidFill>
@@ -6198,7 +6105,7 @@
         </p:nvSpPr>
         <p:spPr>
           <a:xfrm>
-            <a:off x="7684922" y="2212848"/>
+            <a:off x="7684922" y="2194560"/>
             <a:ext cx="1649882" cy="274320"/>
           </a:xfrm>
           <a:prstGeom prst="rect">
@@ -6212,14 +6119,7 @@
           </a:bodyPr>
           <a:lstStyle/>
           <a:p>
-            <a:pPr algn="l">
-              <a:spcBef>
-                <a:spcPts val="0"/>
-              </a:spcBef>
-              <a:spcAft>
-                <a:spcPts val="0"/>
-              </a:spcAft>
-            </a:pPr>
+            <a:pPr algn="l"/>
             <a:r>
               <a:rPr sz="1050" b="0" i="0">
                 <a:solidFill>
@@ -6240,7 +6140,7 @@
         </p:nvSpPr>
         <p:spPr>
           <a:xfrm>
-            <a:off x="7684922" y="2487168"/>
+            <a:off x="7684922" y="2468880"/>
             <a:ext cx="1649882" cy="274320"/>
           </a:xfrm>
           <a:prstGeom prst="rect">
@@ -6254,14 +6154,7 @@
           </a:bodyPr>
           <a:lstStyle/>
           <a:p>
-            <a:pPr algn="l">
-              <a:spcBef>
-                <a:spcPts val="0"/>
-              </a:spcBef>
-              <a:spcAft>
-                <a:spcPts val="0"/>
-              </a:spcAft>
-            </a:pPr>
+            <a:pPr algn="l"/>
             <a:r>
               <a:rPr sz="750" b="0" i="0" spc="120">
                 <a:solidFill>
@@ -6326,28 +6219,21 @@
         </p:nvSpPr>
         <p:spPr>
           <a:xfrm>
-            <a:off x="9609124" y="1700784"/>
-            <a:ext cx="1649882" cy="457200"/>
-          </a:xfrm>
-          <a:prstGeom prst="rect">
-            <a:avLst/>
-          </a:prstGeom>
-          <a:noFill/>
-        </p:spPr>
-        <p:txBody>
-          <a:bodyPr wrap="square" anchor="t" lIns="0" rIns="0" tIns="0" bIns="0">
-            <a:noAutofit/>
-          </a:bodyPr>
-          <a:lstStyle/>
-          <a:p>
-            <a:pPr algn="l">
-              <a:spcBef>
-                <a:spcPts val="0"/>
-              </a:spcBef>
-              <a:spcAft>
-                <a:spcPts val="0"/>
-              </a:spcAft>
-            </a:pPr>
+            <a:off x="9609124" y="1682495"/>
+            <a:ext cx="1649882" cy="502920"/>
+          </a:xfrm>
+          <a:prstGeom prst="rect">
+            <a:avLst/>
+          </a:prstGeom>
+          <a:noFill/>
+        </p:spPr>
+        <p:txBody>
+          <a:bodyPr wrap="square" anchor="t" lIns="0" rIns="0" tIns="0" bIns="0">
+            <a:noAutofit/>
+          </a:bodyPr>
+          <a:lstStyle/>
+          <a:p>
+            <a:pPr algn="l"/>
             <a:r>
               <a:rPr sz="2600" b="0" i="0" spc="-60">
                 <a:solidFill>
@@ -6368,7 +6254,7 @@
         </p:nvSpPr>
         <p:spPr>
           <a:xfrm>
-            <a:off x="9609124" y="2212848"/>
+            <a:off x="9609124" y="2194560"/>
             <a:ext cx="1649882" cy="274320"/>
           </a:xfrm>
           <a:prstGeom prst="rect">
@@ -6382,14 +6268,7 @@
           </a:bodyPr>
           <a:lstStyle/>
           <a:p>
-            <a:pPr algn="l">
-              <a:spcBef>
-                <a:spcPts val="0"/>
-              </a:spcBef>
-              <a:spcAft>
-                <a:spcPts val="0"/>
-              </a:spcAft>
-            </a:pPr>
+            <a:pPr algn="l"/>
             <a:r>
               <a:rPr sz="1050" b="0" i="0">
                 <a:solidFill>
@@ -6410,7 +6289,7 @@
         </p:nvSpPr>
         <p:spPr>
           <a:xfrm>
-            <a:off x="9609124" y="2487168"/>
+            <a:off x="9609124" y="2468880"/>
             <a:ext cx="1649882" cy="274320"/>
           </a:xfrm>
           <a:prstGeom prst="rect">
@@ -6424,14 +6303,7 @@
           </a:bodyPr>
           <a:lstStyle/>
           <a:p>
-            <a:pPr algn="l">
-              <a:spcBef>
-                <a:spcPts val="0"/>
-              </a:spcBef>
-              <a:spcAft>
-                <a:spcPts val="0"/>
-              </a:spcAft>
-            </a:pPr>
+            <a:pPr algn="l"/>
             <a:r>
               <a:rPr sz="750" b="0" i="0" spc="120">
                 <a:solidFill>
@@ -6496,28 +6368,21 @@
         </p:nvSpPr>
         <p:spPr>
           <a:xfrm>
-            <a:off x="5760720" y="3255264"/>
-            <a:ext cx="1649882" cy="457200"/>
-          </a:xfrm>
-          <a:prstGeom prst="rect">
-            <a:avLst/>
-          </a:prstGeom>
-          <a:noFill/>
-        </p:spPr>
-        <p:txBody>
-          <a:bodyPr wrap="square" anchor="t" lIns="0" rIns="0" tIns="0" bIns="0">
-            <a:noAutofit/>
-          </a:bodyPr>
-          <a:lstStyle/>
-          <a:p>
-            <a:pPr algn="l">
-              <a:spcBef>
-                <a:spcPts val="0"/>
-              </a:spcBef>
-              <a:spcAft>
-                <a:spcPts val="0"/>
-              </a:spcAft>
-            </a:pPr>
+            <a:off x="5760720" y="3236976"/>
+            <a:ext cx="1649882" cy="502920"/>
+          </a:xfrm>
+          <a:prstGeom prst="rect">
+            <a:avLst/>
+          </a:prstGeom>
+          <a:noFill/>
+        </p:spPr>
+        <p:txBody>
+          <a:bodyPr wrap="square" anchor="t" lIns="0" rIns="0" tIns="0" bIns="0">
+            <a:noAutofit/>
+          </a:bodyPr>
+          <a:lstStyle/>
+          <a:p>
+            <a:pPr algn="l"/>
             <a:r>
               <a:rPr sz="2600" b="0" i="0" spc="-60">
                 <a:solidFill>
@@ -6538,7 +6403,7 @@
         </p:nvSpPr>
         <p:spPr>
           <a:xfrm>
-            <a:off x="5760720" y="3767328"/>
+            <a:off x="5760720" y="3749039"/>
             <a:ext cx="1649882" cy="274320"/>
           </a:xfrm>
           <a:prstGeom prst="rect">
@@ -6552,14 +6417,7 @@
           </a:bodyPr>
           <a:lstStyle/>
           <a:p>
-            <a:pPr algn="l">
-              <a:spcBef>
-                <a:spcPts val="0"/>
-              </a:spcBef>
-              <a:spcAft>
-                <a:spcPts val="0"/>
-              </a:spcAft>
-            </a:pPr>
+            <a:pPr algn="l"/>
             <a:r>
               <a:rPr sz="1050" b="0" i="0">
                 <a:solidFill>
@@ -6580,7 +6438,7 @@
         </p:nvSpPr>
         <p:spPr>
           <a:xfrm>
-            <a:off x="5760720" y="4041648"/>
+            <a:off x="5760720" y="4023360"/>
             <a:ext cx="1649882" cy="274320"/>
           </a:xfrm>
           <a:prstGeom prst="rect">
@@ -6594,14 +6452,7 @@
           </a:bodyPr>
           <a:lstStyle/>
           <a:p>
-            <a:pPr algn="l">
-              <a:spcBef>
-                <a:spcPts val="0"/>
-              </a:spcBef>
-              <a:spcAft>
-                <a:spcPts val="0"/>
-              </a:spcAft>
-            </a:pPr>
+            <a:pPr algn="l"/>
             <a:r>
               <a:rPr sz="750" b="0" i="0" spc="120">
                 <a:solidFill>
@@ -6666,28 +6517,21 @@
         </p:nvSpPr>
         <p:spPr>
           <a:xfrm>
-            <a:off x="7684922" y="3255264"/>
-            <a:ext cx="1649882" cy="457200"/>
-          </a:xfrm>
-          <a:prstGeom prst="rect">
-            <a:avLst/>
-          </a:prstGeom>
-          <a:noFill/>
-        </p:spPr>
-        <p:txBody>
-          <a:bodyPr wrap="square" anchor="t" lIns="0" rIns="0" tIns="0" bIns="0">
-            <a:noAutofit/>
-          </a:bodyPr>
-          <a:lstStyle/>
-          <a:p>
-            <a:pPr algn="l">
-              <a:spcBef>
-                <a:spcPts val="0"/>
-              </a:spcBef>
-              <a:spcAft>
-                <a:spcPts val="0"/>
-              </a:spcAft>
-            </a:pPr>
+            <a:off x="7684922" y="3236976"/>
+            <a:ext cx="1649882" cy="502920"/>
+          </a:xfrm>
+          <a:prstGeom prst="rect">
+            <a:avLst/>
+          </a:prstGeom>
+          <a:noFill/>
+        </p:spPr>
+        <p:txBody>
+          <a:bodyPr wrap="square" anchor="t" lIns="0" rIns="0" tIns="0" bIns="0">
+            <a:noAutofit/>
+          </a:bodyPr>
+          <a:lstStyle/>
+          <a:p>
+            <a:pPr algn="l"/>
             <a:r>
               <a:rPr sz="2600" b="0" i="0" spc="-60">
                 <a:solidFill>
@@ -6708,7 +6552,7 @@
         </p:nvSpPr>
         <p:spPr>
           <a:xfrm>
-            <a:off x="7684922" y="3767328"/>
+            <a:off x="7684922" y="3749039"/>
             <a:ext cx="1649882" cy="274320"/>
           </a:xfrm>
           <a:prstGeom prst="rect">
@@ -6722,14 +6566,7 @@
           </a:bodyPr>
           <a:lstStyle/>
           <a:p>
-            <a:pPr algn="l">
-              <a:spcBef>
-                <a:spcPts val="0"/>
-              </a:spcBef>
-              <a:spcAft>
-                <a:spcPts val="0"/>
-              </a:spcAft>
-            </a:pPr>
+            <a:pPr algn="l"/>
             <a:r>
               <a:rPr sz="1050" b="0" i="0">
                 <a:solidFill>
@@ -6750,7 +6587,7 @@
         </p:nvSpPr>
         <p:spPr>
           <a:xfrm>
-            <a:off x="7684922" y="4041648"/>
+            <a:off x="7684922" y="4023360"/>
             <a:ext cx="1649882" cy="274320"/>
           </a:xfrm>
           <a:prstGeom prst="rect">
@@ -6764,14 +6601,7 @@
           </a:bodyPr>
           <a:lstStyle/>
           <a:p>
-            <a:pPr algn="l">
-              <a:spcBef>
-                <a:spcPts val="0"/>
-              </a:spcBef>
-              <a:spcAft>
-                <a:spcPts val="0"/>
-              </a:spcAft>
-            </a:pPr>
+            <a:pPr algn="l"/>
             <a:r>
               <a:rPr sz="750" b="0" i="0" spc="120">
                 <a:solidFill>
@@ -6836,28 +6666,21 @@
         </p:nvSpPr>
         <p:spPr>
           <a:xfrm>
-            <a:off x="9609124" y="3255264"/>
-            <a:ext cx="1649882" cy="457200"/>
-          </a:xfrm>
-          <a:prstGeom prst="rect">
-            <a:avLst/>
-          </a:prstGeom>
-          <a:noFill/>
-        </p:spPr>
-        <p:txBody>
-          <a:bodyPr wrap="square" anchor="t" lIns="0" rIns="0" tIns="0" bIns="0">
-            <a:noAutofit/>
-          </a:bodyPr>
-          <a:lstStyle/>
-          <a:p>
-            <a:pPr algn="l">
-              <a:spcBef>
-                <a:spcPts val="0"/>
-              </a:spcBef>
-              <a:spcAft>
-                <a:spcPts val="0"/>
-              </a:spcAft>
-            </a:pPr>
+            <a:off x="9609124" y="3236976"/>
+            <a:ext cx="1649882" cy="502920"/>
+          </a:xfrm>
+          <a:prstGeom prst="rect">
+            <a:avLst/>
+          </a:prstGeom>
+          <a:noFill/>
+        </p:spPr>
+        <p:txBody>
+          <a:bodyPr wrap="square" anchor="t" lIns="0" rIns="0" tIns="0" bIns="0">
+            <a:noAutofit/>
+          </a:bodyPr>
+          <a:lstStyle/>
+          <a:p>
+            <a:pPr algn="l"/>
             <a:r>
               <a:rPr sz="2600" b="0" i="0" spc="-60">
                 <a:solidFill>
@@ -6878,7 +6701,7 @@
         </p:nvSpPr>
         <p:spPr>
           <a:xfrm>
-            <a:off x="9609124" y="3767328"/>
+            <a:off x="9609124" y="3749039"/>
             <a:ext cx="1649882" cy="274320"/>
           </a:xfrm>
           <a:prstGeom prst="rect">
@@ -6892,14 +6715,7 @@
           </a:bodyPr>
           <a:lstStyle/>
           <a:p>
-            <a:pPr algn="l">
-              <a:spcBef>
-                <a:spcPts val="0"/>
-              </a:spcBef>
-              <a:spcAft>
-                <a:spcPts val="0"/>
-              </a:spcAft>
-            </a:pPr>
+            <a:pPr algn="l"/>
             <a:r>
               <a:rPr sz="1050" b="0" i="0">
                 <a:solidFill>
@@ -6920,7 +6736,7 @@
         </p:nvSpPr>
         <p:spPr>
           <a:xfrm>
-            <a:off x="9609124" y="4041648"/>
+            <a:off x="9609124" y="4023360"/>
             <a:ext cx="1649882" cy="274320"/>
           </a:xfrm>
           <a:prstGeom prst="rect">
@@ -6934,14 +6750,7 @@
           </a:bodyPr>
           <a:lstStyle/>
           <a:p>
-            <a:pPr algn="l">
-              <a:spcBef>
-                <a:spcPts val="0"/>
-              </a:spcBef>
-              <a:spcAft>
-                <a:spcPts val="0"/>
-              </a:spcAft>
-            </a:pPr>
+            <a:pPr algn="l"/>
             <a:r>
               <a:rPr sz="750" b="0" i="0" spc="120">
                 <a:solidFill>
@@ -7012,14 +6821,7 @@
           </a:bodyPr>
           <a:lstStyle/>
           <a:p>
-            <a:pPr algn="l">
-              <a:spcBef>
-                <a:spcPts val="0"/>
-              </a:spcBef>
-              <a:spcAft>
-                <a:spcPts val="0"/>
-              </a:spcAft>
-            </a:pPr>
+            <a:pPr algn="l"/>
             <a:r>
               <a:rPr sz="850" b="0" i="0" spc="140">
                 <a:solidFill>
@@ -7038,9 +6840,6 @@
               <a:spcBef>
                 <a:spcPts val="400"/>
               </a:spcBef>
-              <a:spcAft>
-                <a:spcPts val="0"/>
-              </a:spcAft>
             </a:pPr>
             <a:r>
               <a:rPr sz="1300" b="0" i="0">
@@ -7105,14 +6904,7 @@
           </a:bodyPr>
           <a:lstStyle/>
           <a:p>
-            <a:pPr algn="l">
-              <a:spcBef>
-                <a:spcPts val="0"/>
-              </a:spcBef>
-              <a:spcAft>
-                <a:spcPts val="0"/>
-              </a:spcAft>
-            </a:pPr>
+            <a:pPr algn="l"/>
             <a:r>
               <a:rPr sz="850" b="0" i="0" spc="150">
                 <a:solidFill>
@@ -7147,14 +6939,7 @@
           </a:bodyPr>
           <a:lstStyle/>
           <a:p>
-            <a:pPr algn="r">
-              <a:spcBef>
-                <a:spcPts val="0"/>
-              </a:spcBef>
-              <a:spcAft>
-                <a:spcPts val="0"/>
-              </a:spcAft>
-            </a:pPr>
+            <a:pPr algn="r"/>
             <a:r>
               <a:rPr sz="850" b="0" i="0" spc="150">
                 <a:solidFill>
@@ -7193,12 +6978,6 @@
               <a:lnSpc>
                 <a:spcPct val="102000"/>
               </a:lnSpc>
-              <a:spcBef>
-                <a:spcPts val="0"/>
-              </a:spcBef>
-              <a:spcAft>
-                <a:spcPts val="0"/>
-              </a:spcAft>
             </a:pPr>
             <a:r>
               <a:rPr sz="2600" b="0" i="0" spc="-30">
@@ -7234,14 +7013,7 @@
           </a:bodyPr>
           <a:lstStyle/>
           <a:p>
-            <a:pPr algn="l">
-              <a:spcBef>
-                <a:spcPts val="0"/>
-              </a:spcBef>
-              <a:spcAft>
-                <a:spcPts val="0"/>
-              </a:spcAft>
-            </a:pPr>
+            <a:pPr algn="l"/>
             <a:r>
               <a:rPr sz="750" b="0" i="0" spc="120">
                 <a:solidFill>
@@ -7280,12 +7052,6 @@
               <a:lnSpc>
                 <a:spcPct val="130000"/>
               </a:lnSpc>
-              <a:spcBef>
-                <a:spcPts val="0"/>
-              </a:spcBef>
-              <a:spcAft>
-                <a:spcPts val="0"/>
-              </a:spcAft>
             </a:pPr>
             <a:r>
               <a:rPr sz="1100" b="0" i="0">
@@ -7321,14 +7087,7 @@
           </a:bodyPr>
           <a:lstStyle/>
           <a:p>
-            <a:pPr algn="l">
-              <a:spcBef>
-                <a:spcPts val="0"/>
-              </a:spcBef>
-              <a:spcAft>
-                <a:spcPts val="0"/>
-              </a:spcAft>
-            </a:pPr>
+            <a:pPr algn="l"/>
             <a:r>
               <a:rPr sz="750" b="0" i="0" spc="120">
                 <a:solidFill>
@@ -7367,12 +7126,6 @@
               <a:lnSpc>
                 <a:spcPct val="130000"/>
               </a:lnSpc>
-              <a:spcBef>
-                <a:spcPts val="0"/>
-              </a:spcBef>
-              <a:spcAft>
-                <a:spcPts val="0"/>
-              </a:spcAft>
             </a:pPr>
             <a:r>
               <a:rPr sz="1100" b="0" i="0">
@@ -7408,14 +7161,7 @@
           </a:bodyPr>
           <a:lstStyle/>
           <a:p>
-            <a:pPr algn="l">
-              <a:spcBef>
-                <a:spcPts val="0"/>
-              </a:spcBef>
-              <a:spcAft>
-                <a:spcPts val="0"/>
-              </a:spcAft>
-            </a:pPr>
+            <a:pPr algn="l"/>
             <a:r>
               <a:rPr sz="750" b="0" i="0" spc="120">
                 <a:solidFill>
@@ -7454,12 +7200,6 @@
               <a:lnSpc>
                 <a:spcPct val="130000"/>
               </a:lnSpc>
-              <a:spcBef>
-                <a:spcPts val="0"/>
-              </a:spcBef>
-              <a:spcAft>
-                <a:spcPts val="0"/>
-              </a:spcAft>
             </a:pPr>
             <a:r>
               <a:rPr sz="1100" b="0" i="0">
@@ -7495,14 +7235,7 @@
           </a:bodyPr>
           <a:lstStyle/>
           <a:p>
-            <a:pPr algn="l">
-              <a:spcBef>
-                <a:spcPts val="0"/>
-              </a:spcBef>
-              <a:spcAft>
-                <a:spcPts val="0"/>
-              </a:spcAft>
-            </a:pPr>
+            <a:pPr algn="l"/>
             <a:r>
               <a:rPr sz="750" b="0" i="0" spc="120">
                 <a:solidFill>
@@ -7541,12 +7274,6 @@
               <a:lnSpc>
                 <a:spcPct val="130000"/>
               </a:lnSpc>
-              <a:spcBef>
-                <a:spcPts val="0"/>
-              </a:spcBef>
-              <a:spcAft>
-                <a:spcPts val="0"/>
-              </a:spcAft>
             </a:pPr>
             <a:r>
               <a:rPr sz="1100" b="0" i="0">
@@ -7582,14 +7309,7 @@
           </a:bodyPr>
           <a:lstStyle/>
           <a:p>
-            <a:pPr algn="l">
-              <a:spcBef>
-                <a:spcPts val="0"/>
-              </a:spcBef>
-              <a:spcAft>
-                <a:spcPts val="0"/>
-              </a:spcAft>
-            </a:pPr>
+            <a:pPr algn="l"/>
             <a:r>
               <a:rPr sz="750" b="0" i="0" spc="120">
                 <a:solidFill>
@@ -7628,12 +7348,6 @@
               <a:lnSpc>
                 <a:spcPct val="130000"/>
               </a:lnSpc>
-              <a:spcBef>
-                <a:spcPts val="0"/>
-              </a:spcBef>
-              <a:spcAft>
-                <a:spcPts val="0"/>
-              </a:spcAft>
             </a:pPr>
             <a:r>
               <a:rPr sz="1100" b="0" i="0">
@@ -7669,14 +7383,7 @@
           </a:bodyPr>
           <a:lstStyle/>
           <a:p>
-            <a:pPr algn="l">
-              <a:spcBef>
-                <a:spcPts val="0"/>
-              </a:spcBef>
-              <a:spcAft>
-                <a:spcPts val="0"/>
-              </a:spcAft>
-            </a:pPr>
+            <a:pPr algn="l"/>
             <a:r>
               <a:rPr sz="750" b="0" i="0" spc="120">
                 <a:solidFill>
@@ -7715,12 +7422,6 @@
               <a:lnSpc>
                 <a:spcPct val="130000"/>
               </a:lnSpc>
-              <a:spcBef>
-                <a:spcPts val="0"/>
-              </a:spcBef>
-              <a:spcAft>
-                <a:spcPts val="0"/>
-              </a:spcAft>
             </a:pPr>
             <a:r>
               <a:rPr sz="1100" b="0" i="0">
@@ -7800,14 +7501,7 @@
           </a:bodyPr>
           <a:lstStyle/>
           <a:p>
-            <a:pPr algn="l">
-              <a:spcBef>
-                <a:spcPts val="0"/>
-              </a:spcBef>
-              <a:spcAft>
-                <a:spcPts val="0"/>
-              </a:spcAft>
-            </a:pPr>
+            <a:pPr algn="l"/>
             <a:r>
               <a:rPr sz="800" b="0" i="0" spc="100">
                 <a:solidFill>
@@ -7826,9 +7520,6 @@
               <a:spcBef>
                 <a:spcPts val="800"/>
               </a:spcBef>
-              <a:spcAft>
-                <a:spcPts val="0"/>
-              </a:spcAft>
             </a:pPr>
             <a:r>
               <a:rPr sz="1150" b="0" i="0">
@@ -7909,14 +7600,7 @@
           </a:bodyPr>
           <a:lstStyle/>
           <a:p>
-            <a:pPr algn="l">
-              <a:spcBef>
-                <a:spcPts val="0"/>
-              </a:spcBef>
-              <a:spcAft>
-                <a:spcPts val="0"/>
-              </a:spcAft>
-            </a:pPr>
+            <a:pPr algn="l"/>
             <a:r>
               <a:rPr sz="1050" b="0" i="0">
                 <a:solidFill>
@@ -7951,14 +7635,7 @@
           </a:bodyPr>
           <a:lstStyle/>
           <a:p>
-            <a:pPr algn="r">
-              <a:spcBef>
-                <a:spcPts val="0"/>
-              </a:spcBef>
-              <a:spcAft>
-                <a:spcPts val="0"/>
-              </a:spcAft>
-            </a:pPr>
+            <a:pPr algn="r"/>
             <a:r>
               <a:rPr sz="1100" b="0" i="0">
                 <a:solidFill>
@@ -8029,14 +7706,7 @@
           </a:bodyPr>
           <a:lstStyle/>
           <a:p>
-            <a:pPr algn="l">
-              <a:spcBef>
-                <a:spcPts val="0"/>
-              </a:spcBef>
-              <a:spcAft>
-                <a:spcPts val="0"/>
-              </a:spcAft>
-            </a:pPr>
+            <a:pPr algn="l"/>
             <a:r>
               <a:rPr sz="1050" b="0" i="0">
                 <a:solidFill>
@@ -8071,14 +7741,7 @@
           </a:bodyPr>
           <a:lstStyle/>
           <a:p>
-            <a:pPr algn="r">
-              <a:spcBef>
-                <a:spcPts val="0"/>
-              </a:spcBef>
-              <a:spcAft>
-                <a:spcPts val="0"/>
-              </a:spcAft>
-            </a:pPr>
+            <a:pPr algn="r"/>
             <a:r>
               <a:rPr sz="1100" b="0" i="0">
                 <a:solidFill>
@@ -8149,14 +7812,7 @@
           </a:bodyPr>
           <a:lstStyle/>
           <a:p>
-            <a:pPr algn="l">
-              <a:spcBef>
-                <a:spcPts val="0"/>
-              </a:spcBef>
-              <a:spcAft>
-                <a:spcPts val="0"/>
-              </a:spcAft>
-            </a:pPr>
+            <a:pPr algn="l"/>
             <a:r>
               <a:rPr sz="1050" b="0" i="0">
                 <a:solidFill>
@@ -8191,14 +7847,7 @@
           </a:bodyPr>
           <a:lstStyle/>
           <a:p>
-            <a:pPr algn="r">
-              <a:spcBef>
-                <a:spcPts val="0"/>
-              </a:spcBef>
-              <a:spcAft>
-                <a:spcPts val="0"/>
-              </a:spcAft>
-            </a:pPr>
+            <a:pPr algn="r"/>
             <a:r>
               <a:rPr sz="1100" b="0" i="0">
                 <a:solidFill>
@@ -8269,14 +7918,7 @@
           </a:bodyPr>
           <a:lstStyle/>
           <a:p>
-            <a:pPr algn="l">
-              <a:spcBef>
-                <a:spcPts val="0"/>
-              </a:spcBef>
-              <a:spcAft>
-                <a:spcPts val="0"/>
-              </a:spcAft>
-            </a:pPr>
+            <a:pPr algn="l"/>
             <a:r>
               <a:rPr sz="1050" b="0" i="0">
                 <a:solidFill>
@@ -8311,14 +7953,7 @@
           </a:bodyPr>
           <a:lstStyle/>
           <a:p>
-            <a:pPr algn="r">
-              <a:spcBef>
-                <a:spcPts val="0"/>
-              </a:spcBef>
-              <a:spcAft>
-                <a:spcPts val="0"/>
-              </a:spcAft>
-            </a:pPr>
+            <a:pPr algn="r"/>
             <a:r>
               <a:rPr sz="1100" b="0" i="0">
                 <a:solidFill>
@@ -8389,14 +8024,7 @@
           </a:bodyPr>
           <a:lstStyle/>
           <a:p>
-            <a:pPr algn="l">
-              <a:spcBef>
-                <a:spcPts val="0"/>
-              </a:spcBef>
-              <a:spcAft>
-                <a:spcPts val="0"/>
-              </a:spcAft>
-            </a:pPr>
+            <a:pPr algn="l"/>
             <a:r>
               <a:rPr sz="850" b="0" i="0" spc="140">
                 <a:solidFill>
@@ -8460,14 +8088,7 @@
           </a:bodyPr>
           <a:lstStyle/>
           <a:p>
-            <a:pPr algn="l">
-              <a:spcBef>
-                <a:spcPts val="0"/>
-              </a:spcBef>
-              <a:spcAft>
-                <a:spcPts val="0"/>
-              </a:spcAft>
-            </a:pPr>
+            <a:pPr algn="l"/>
             <a:r>
               <a:rPr sz="15000" b="0" i="0" spc="-600">
                 <a:ln w="20000">
@@ -8543,14 +8164,7 @@
           </a:bodyPr>
           <a:lstStyle/>
           <a:p>
-            <a:pPr algn="l">
-              <a:spcBef>
-                <a:spcPts val="0"/>
-              </a:spcBef>
-              <a:spcAft>
-                <a:spcPts val="0"/>
-              </a:spcAft>
-            </a:pPr>
+            <a:pPr algn="l"/>
             <a:r>
               <a:rPr sz="850" b="0" i="0" spc="150">
                 <a:solidFill>
@@ -8589,12 +8203,6 @@
               <a:lnSpc>
                 <a:spcPct val="103000"/>
               </a:lnSpc>
-              <a:spcBef>
-                <a:spcPts val="0"/>
-              </a:spcBef>
-              <a:spcAft>
-                <a:spcPts val="0"/>
-              </a:spcAft>
             </a:pPr>
             <a:r>
               <a:rPr sz="4000" b="0" i="0" spc="-60">
@@ -8634,12 +8242,6 @@
               <a:lnSpc>
                 <a:spcPct val="135000"/>
               </a:lnSpc>
-              <a:spcBef>
-                <a:spcPts val="0"/>
-              </a:spcBef>
-              <a:spcAft>
-                <a:spcPts val="0"/>
-              </a:spcAft>
             </a:pPr>
             <a:r>
               <a:rPr sz="1250" b="0" i="0">
@@ -8675,14 +8277,7 @@
           </a:bodyPr>
           <a:lstStyle/>
           <a:p>
-            <a:pPr algn="r">
-              <a:spcBef>
-                <a:spcPts val="0"/>
-              </a:spcBef>
-              <a:spcAft>
-                <a:spcPts val="0"/>
-              </a:spcAft>
-            </a:pPr>
+            <a:pPr algn="r"/>
             <a:r>
               <a:rPr sz="850" b="0" i="0" spc="150">
                 <a:solidFill>
@@ -8746,14 +8341,7 @@
           </a:bodyPr>
           <a:lstStyle/>
           <a:p>
-            <a:pPr algn="l">
-              <a:spcBef>
-                <a:spcPts val="0"/>
-              </a:spcBef>
-              <a:spcAft>
-                <a:spcPts val="0"/>
-              </a:spcAft>
-            </a:pPr>
+            <a:pPr algn="l"/>
             <a:r>
               <a:rPr sz="850" b="0" i="0" spc="150">
                 <a:solidFill>
@@ -8788,14 +8376,7 @@
           </a:bodyPr>
           <a:lstStyle/>
           <a:p>
-            <a:pPr algn="r">
-              <a:spcBef>
-                <a:spcPts val="0"/>
-              </a:spcBef>
-              <a:spcAft>
-                <a:spcPts val="0"/>
-              </a:spcAft>
-            </a:pPr>
+            <a:pPr algn="r"/>
             <a:r>
               <a:rPr sz="850" b="0" i="0" spc="150">
                 <a:solidFill>
@@ -8834,12 +8415,6 @@
               <a:lnSpc>
                 <a:spcPct val="102000"/>
               </a:lnSpc>
-              <a:spcBef>
-                <a:spcPts val="0"/>
-              </a:spcBef>
-              <a:spcAft>
-                <a:spcPts val="0"/>
-              </a:spcAft>
             </a:pPr>
             <a:r>
               <a:rPr sz="2600" b="0" i="0" spc="-30">
@@ -8879,12 +8454,6 @@
               <a:lnSpc>
                 <a:spcPct val="142000"/>
               </a:lnSpc>
-              <a:spcBef>
-                <a:spcPts val="0"/>
-              </a:spcBef>
-              <a:spcAft>
-                <a:spcPts val="0"/>
-              </a:spcAft>
             </a:pPr>
             <a:r>
               <a:rPr sz="1150" b="0" i="0">
@@ -8956,14 +8525,7 @@
           </a:bodyPr>
           <a:lstStyle/>
           <a:p>
-            <a:pPr algn="l">
-              <a:spcBef>
-                <a:spcPts val="0"/>
-              </a:spcBef>
-              <a:spcAft>
-                <a:spcPts val="0"/>
-              </a:spcAft>
-            </a:pPr>
+            <a:pPr algn="l"/>
             <a:r>
               <a:rPr sz="750" b="0" i="0" spc="120">
                 <a:solidFill>
@@ -9002,12 +8564,6 @@
               <a:lnSpc>
                 <a:spcPct val="130000"/>
               </a:lnSpc>
-              <a:spcBef>
-                <a:spcPts val="0"/>
-              </a:spcBef>
-              <a:spcAft>
-                <a:spcPts val="0"/>
-              </a:spcAft>
             </a:pPr>
             <a:r>
               <a:rPr sz="1100" b="0" i="0">
@@ -9043,14 +8599,7 @@
           </a:bodyPr>
           <a:lstStyle/>
           <a:p>
-            <a:pPr algn="l">
-              <a:spcBef>
-                <a:spcPts val="0"/>
-              </a:spcBef>
-              <a:spcAft>
-                <a:spcPts val="0"/>
-              </a:spcAft>
-            </a:pPr>
+            <a:pPr algn="l"/>
             <a:r>
               <a:rPr sz="750" b="0" i="0" spc="120">
                 <a:solidFill>
@@ -9089,12 +8638,6 @@
               <a:lnSpc>
                 <a:spcPct val="130000"/>
               </a:lnSpc>
-              <a:spcBef>
-                <a:spcPts val="0"/>
-              </a:spcBef>
-              <a:spcAft>
-                <a:spcPts val="0"/>
-              </a:spcAft>
             </a:pPr>
             <a:r>
               <a:rPr sz="1100" b="0" i="0">
@@ -9130,14 +8673,7 @@
           </a:bodyPr>
           <a:lstStyle/>
           <a:p>
-            <a:pPr algn="l">
-              <a:spcBef>
-                <a:spcPts val="0"/>
-              </a:spcBef>
-              <a:spcAft>
-                <a:spcPts val="0"/>
-              </a:spcAft>
-            </a:pPr>
+            <a:pPr algn="l"/>
             <a:r>
               <a:rPr sz="750" b="0" i="0" spc="120">
                 <a:solidFill>
@@ -9176,12 +8712,6 @@
               <a:lnSpc>
                 <a:spcPct val="130000"/>
               </a:lnSpc>
-              <a:spcBef>
-                <a:spcPts val="0"/>
-              </a:spcBef>
-              <a:spcAft>
-                <a:spcPts val="0"/>
-              </a:spcAft>
             </a:pPr>
             <a:r>
               <a:rPr sz="1100" b="0" i="0">
@@ -9217,14 +8747,7 @@
           </a:bodyPr>
           <a:lstStyle/>
           <a:p>
-            <a:pPr algn="l">
-              <a:spcBef>
-                <a:spcPts val="0"/>
-              </a:spcBef>
-              <a:spcAft>
-                <a:spcPts val="0"/>
-              </a:spcAft>
-            </a:pPr>
+            <a:pPr algn="l"/>
             <a:r>
               <a:rPr sz="750" b="0" i="0" spc="120">
                 <a:solidFill>
@@ -9263,12 +8786,6 @@
               <a:lnSpc>
                 <a:spcPct val="130000"/>
               </a:lnSpc>
-              <a:spcBef>
-                <a:spcPts val="0"/>
-              </a:spcBef>
-              <a:spcAft>
-                <a:spcPts val="0"/>
-              </a:spcAft>
             </a:pPr>
             <a:r>
               <a:rPr sz="1100" b="0" i="0">
@@ -9304,14 +8821,7 @@
           </a:bodyPr>
           <a:lstStyle/>
           <a:p>
-            <a:pPr algn="l">
-              <a:spcBef>
-                <a:spcPts val="0"/>
-              </a:spcBef>
-              <a:spcAft>
-                <a:spcPts val="0"/>
-              </a:spcAft>
-            </a:pPr>
+            <a:pPr algn="l"/>
             <a:r>
               <a:rPr sz="900" b="0" i="0" spc="150">
                 <a:solidFill>
@@ -9386,12 +8896,6 @@
               <a:lnSpc>
                 <a:spcPct val="126000"/>
               </a:lnSpc>
-              <a:spcBef>
-                <a:spcPts val="0"/>
-              </a:spcBef>
-              <a:spcAft>
-                <a:spcPts val="0"/>
-              </a:spcAft>
             </a:pPr>
             <a:r>
               <a:rPr sz="1100" b="0" i="0">
@@ -9408,12 +8912,6 @@
               <a:lnSpc>
                 <a:spcPct val="120000"/>
               </a:lnSpc>
-              <a:spcBef>
-                <a:spcPts val="0"/>
-              </a:spcBef>
-              <a:spcAft>
-                <a:spcPts val="0"/>
-              </a:spcAft>
             </a:pPr>
             <a:r>
               <a:rPr sz="950" b="0" i="0">
@@ -9489,12 +8987,6 @@
               <a:lnSpc>
                 <a:spcPct val="126000"/>
               </a:lnSpc>
-              <a:spcBef>
-                <a:spcPts val="0"/>
-              </a:spcBef>
-              <a:spcAft>
-                <a:spcPts val="0"/>
-              </a:spcAft>
             </a:pPr>
             <a:r>
               <a:rPr sz="1100" b="0" i="0">
@@ -9511,12 +9003,6 @@
               <a:lnSpc>
                 <a:spcPct val="120000"/>
               </a:lnSpc>
-              <a:spcBef>
-                <a:spcPts val="0"/>
-              </a:spcBef>
-              <a:spcAft>
-                <a:spcPts val="0"/>
-              </a:spcAft>
             </a:pPr>
             <a:r>
               <a:rPr sz="950" b="0" i="0">
@@ -9592,12 +9078,6 @@
               <a:lnSpc>
                 <a:spcPct val="126000"/>
               </a:lnSpc>
-              <a:spcBef>
-                <a:spcPts val="0"/>
-              </a:spcBef>
-              <a:spcAft>
-                <a:spcPts val="0"/>
-              </a:spcAft>
             </a:pPr>
             <a:r>
               <a:rPr sz="1100" b="0" i="0">
@@ -9614,12 +9094,6 @@
               <a:lnSpc>
                 <a:spcPct val="120000"/>
               </a:lnSpc>
-              <a:spcBef>
-                <a:spcPts val="0"/>
-              </a:spcBef>
-              <a:spcAft>
-                <a:spcPts val="0"/>
-              </a:spcAft>
             </a:pPr>
             <a:r>
               <a:rPr sz="950" b="0" i="0">
@@ -9695,12 +9169,6 @@
               <a:lnSpc>
                 <a:spcPct val="126000"/>
               </a:lnSpc>
-              <a:spcBef>
-                <a:spcPts val="0"/>
-              </a:spcBef>
-              <a:spcAft>
-                <a:spcPts val="0"/>
-              </a:spcAft>
             </a:pPr>
             <a:r>
               <a:rPr sz="1100" b="0" i="0">
@@ -9717,12 +9185,6 @@
               <a:lnSpc>
                 <a:spcPct val="120000"/>
               </a:lnSpc>
-              <a:spcBef>
-                <a:spcPts val="0"/>
-              </a:spcBef>
-              <a:spcAft>
-                <a:spcPts val="0"/>
-              </a:spcAft>
             </a:pPr>
             <a:r>
               <a:rPr sz="950" b="0" i="0">
@@ -9794,14 +9256,7 @@
           </a:bodyPr>
           <a:lstStyle/>
           <a:p>
-            <a:pPr algn="l">
-              <a:spcBef>
-                <a:spcPts val="0"/>
-              </a:spcBef>
-              <a:spcAft>
-                <a:spcPts val="0"/>
-              </a:spcAft>
-            </a:pPr>
+            <a:pPr algn="l"/>
             <a:r>
               <a:rPr sz="850" b="0" i="0" spc="140">
                 <a:solidFill>
@@ -9865,14 +9320,7 @@
           </a:bodyPr>
           <a:lstStyle/>
           <a:p>
-            <a:pPr algn="l">
-              <a:spcBef>
-                <a:spcPts val="0"/>
-              </a:spcBef>
-              <a:spcAft>
-                <a:spcPts val="0"/>
-              </a:spcAft>
-            </a:pPr>
+            <a:pPr algn="l"/>
             <a:r>
               <a:rPr sz="15000" b="0" i="0" spc="-600">
                 <a:ln w="20000">
@@ -9948,14 +9396,7 @@
           </a:bodyPr>
           <a:lstStyle/>
           <a:p>
-            <a:pPr algn="l">
-              <a:spcBef>
-                <a:spcPts val="0"/>
-              </a:spcBef>
-              <a:spcAft>
-                <a:spcPts val="0"/>
-              </a:spcAft>
-            </a:pPr>
+            <a:pPr algn="l"/>
             <a:r>
               <a:rPr sz="850" b="0" i="0" spc="150">
                 <a:solidFill>
@@ -9994,12 +9435,6 @@
               <a:lnSpc>
                 <a:spcPct val="103000"/>
               </a:lnSpc>
-              <a:spcBef>
-                <a:spcPts val="0"/>
-              </a:spcBef>
-              <a:spcAft>
-                <a:spcPts val="0"/>
-              </a:spcAft>
             </a:pPr>
             <a:r>
               <a:rPr sz="4000" b="0" i="0" spc="-60">
@@ -10039,12 +9474,6 @@
               <a:lnSpc>
                 <a:spcPct val="135000"/>
               </a:lnSpc>
-              <a:spcBef>
-                <a:spcPts val="0"/>
-              </a:spcBef>
-              <a:spcAft>
-                <a:spcPts val="0"/>
-              </a:spcAft>
             </a:pPr>
             <a:r>
               <a:rPr sz="1250" b="0" i="0">
@@ -10080,14 +9509,7 @@
           </a:bodyPr>
           <a:lstStyle/>
           <a:p>
-            <a:pPr algn="r">
-              <a:spcBef>
-                <a:spcPts val="0"/>
-              </a:spcBef>
-              <a:spcAft>
-                <a:spcPts val="0"/>
-              </a:spcAft>
-            </a:pPr>
+            <a:pPr algn="r"/>
             <a:r>
               <a:rPr sz="850" b="0" i="0" spc="150">
                 <a:solidFill>
@@ -10151,14 +9573,7 @@
           </a:bodyPr>
           <a:lstStyle/>
           <a:p>
-            <a:pPr algn="l">
-              <a:spcBef>
-                <a:spcPts val="0"/>
-              </a:spcBef>
-              <a:spcAft>
-                <a:spcPts val="0"/>
-              </a:spcAft>
-            </a:pPr>
+            <a:pPr algn="l"/>
             <a:r>
               <a:rPr sz="850" b="0" i="0" spc="150">
                 <a:solidFill>
@@ -10193,14 +9608,7 @@
           </a:bodyPr>
           <a:lstStyle/>
           <a:p>
-            <a:pPr algn="r">
-              <a:spcBef>
-                <a:spcPts val="0"/>
-              </a:spcBef>
-              <a:spcAft>
-                <a:spcPts val="0"/>
-              </a:spcAft>
-            </a:pPr>
+            <a:pPr algn="r"/>
             <a:r>
               <a:rPr sz="850" b="0" i="0" spc="150">
                 <a:solidFill>
@@ -10239,12 +9647,6 @@
               <a:lnSpc>
                 <a:spcPct val="102000"/>
               </a:lnSpc>
-              <a:spcBef>
-                <a:spcPts val="0"/>
-              </a:spcBef>
-              <a:spcAft>
-                <a:spcPts val="0"/>
-              </a:spcAft>
             </a:pPr>
             <a:r>
               <a:rPr sz="2600" b="0" i="0" spc="-30">
@@ -10284,12 +9686,6 @@
               <a:lnSpc>
                 <a:spcPct val="142000"/>
               </a:lnSpc>
-              <a:spcBef>
-                <a:spcPts val="0"/>
-              </a:spcBef>
-              <a:spcAft>
-                <a:spcPts val="0"/>
-              </a:spcAft>
             </a:pPr>
             <a:r>
               <a:rPr sz="1150" b="0" i="0">
@@ -10329,12 +9725,6 @@
               <a:lnSpc>
                 <a:spcPct val="95000"/>
               </a:lnSpc>
-              <a:spcBef>
-                <a:spcPts val="0"/>
-              </a:spcBef>
-              <a:spcAft>
-                <a:spcPts val="0"/>
-              </a:spcAft>
             </a:pPr>
             <a:r>
               <a:rPr sz="5400" b="0" i="0" spc="-120">
@@ -10379,14 +9769,7 @@
           </a:bodyPr>
           <a:lstStyle/>
           <a:p>
-            <a:pPr algn="l">
-              <a:spcBef>
-                <a:spcPts val="0"/>
-              </a:spcBef>
-              <a:spcAft>
-                <a:spcPts val="0"/>
-              </a:spcAft>
-            </a:pPr>
+            <a:pPr algn="l"/>
             <a:r>
               <a:rPr sz="850" b="0" i="0" spc="140">
                 <a:solidFill>
@@ -10421,14 +9804,7 @@
           </a:bodyPr>
           <a:lstStyle/>
           <a:p>
-            <a:pPr algn="l">
-              <a:spcBef>
-                <a:spcPts val="0"/>
-              </a:spcBef>
-              <a:spcAft>
-                <a:spcPts val="0"/>
-              </a:spcAft>
-            </a:pPr>
+            <a:pPr algn="l"/>
             <a:r>
               <a:rPr sz="800" b="0" i="0" spc="150">
                 <a:solidFill>
@@ -10463,14 +9839,7 @@
           </a:bodyPr>
           <a:lstStyle/>
           <a:p>
-            <a:pPr algn="r">
-              <a:spcBef>
-                <a:spcPts val="0"/>
-              </a:spcBef>
-              <a:spcAft>
-                <a:spcPts val="0"/>
-              </a:spcAft>
-            </a:pPr>
+            <a:pPr algn="r"/>
             <a:r>
               <a:rPr sz="800" b="0" i="0" spc="150">
                 <a:solidFill>
@@ -10505,14 +9874,7 @@
           </a:bodyPr>
           <a:lstStyle/>
           <a:p>
-            <a:pPr algn="r">
-              <a:spcBef>
-                <a:spcPts val="0"/>
-              </a:spcBef>
-              <a:spcAft>
-                <a:spcPts val="0"/>
-              </a:spcAft>
-            </a:pPr>
+            <a:pPr algn="r"/>
             <a:r>
               <a:rPr sz="800" b="0" i="0" spc="150">
                 <a:solidFill>
@@ -10583,14 +9945,7 @@
           </a:bodyPr>
           <a:lstStyle/>
           <a:p>
-            <a:pPr algn="l">
-              <a:spcBef>
-                <a:spcPts val="0"/>
-              </a:spcBef>
-              <a:spcAft>
-                <a:spcPts val="0"/>
-              </a:spcAft>
-            </a:pPr>
+            <a:pPr algn="l"/>
             <a:r>
               <a:rPr sz="1100" b="0" i="0">
                 <a:solidFill>
@@ -10625,14 +9980,7 @@
           </a:bodyPr>
           <a:lstStyle/>
           <a:p>
-            <a:pPr algn="r">
-              <a:spcBef>
-                <a:spcPts val="0"/>
-              </a:spcBef>
-              <a:spcAft>
-                <a:spcPts val="0"/>
-              </a:spcAft>
-            </a:pPr>
+            <a:pPr algn="r"/>
             <a:r>
               <a:rPr sz="1150" b="0" i="0">
                 <a:solidFill>
@@ -10667,14 +10015,7 @@
           </a:bodyPr>
           <a:lstStyle/>
           <a:p>
-            <a:pPr algn="r">
-              <a:spcBef>
-                <a:spcPts val="0"/>
-              </a:spcBef>
-              <a:spcAft>
-                <a:spcPts val="0"/>
-              </a:spcAft>
-            </a:pPr>
+            <a:pPr algn="r"/>
             <a:r>
               <a:rPr sz="1150" b="0" i="0">
                 <a:solidFill>
@@ -10745,14 +10086,7 @@
           </a:bodyPr>
           <a:lstStyle/>
           <a:p>
-            <a:pPr algn="l">
-              <a:spcBef>
-                <a:spcPts val="0"/>
-              </a:spcBef>
-              <a:spcAft>
-                <a:spcPts val="0"/>
-              </a:spcAft>
-            </a:pPr>
+            <a:pPr algn="l"/>
             <a:r>
               <a:rPr sz="1100" b="0" i="0">
                 <a:solidFill>
@@ -10787,14 +10121,7 @@
           </a:bodyPr>
           <a:lstStyle/>
           <a:p>
-            <a:pPr algn="r">
-              <a:spcBef>
-                <a:spcPts val="0"/>
-              </a:spcBef>
-              <a:spcAft>
-                <a:spcPts val="0"/>
-              </a:spcAft>
-            </a:pPr>
+            <a:pPr algn="r"/>
             <a:r>
               <a:rPr sz="1150" b="0" i="0">
                 <a:solidFill>
@@ -10829,14 +10156,7 @@
           </a:bodyPr>
           <a:lstStyle/>
           <a:p>
-            <a:pPr algn="r">
-              <a:spcBef>
-                <a:spcPts val="0"/>
-              </a:spcBef>
-              <a:spcAft>
-                <a:spcPts val="0"/>
-              </a:spcAft>
-            </a:pPr>
+            <a:pPr algn="r"/>
             <a:r>
               <a:rPr sz="1150" b="0" i="0">
                 <a:solidFill>
@@ -10907,14 +10227,7 @@
           </a:bodyPr>
           <a:lstStyle/>
           <a:p>
-            <a:pPr algn="l">
-              <a:spcBef>
-                <a:spcPts val="0"/>
-              </a:spcBef>
-              <a:spcAft>
-                <a:spcPts val="0"/>
-              </a:spcAft>
-            </a:pPr>
+            <a:pPr algn="l"/>
             <a:r>
               <a:rPr sz="1100" b="0" i="0">
                 <a:solidFill>
@@ -10949,14 +10262,7 @@
           </a:bodyPr>
           <a:lstStyle/>
           <a:p>
-            <a:pPr algn="r">
-              <a:spcBef>
-                <a:spcPts val="0"/>
-              </a:spcBef>
-              <a:spcAft>
-                <a:spcPts val="0"/>
-              </a:spcAft>
-            </a:pPr>
+            <a:pPr algn="r"/>
             <a:r>
               <a:rPr sz="1150" b="0" i="0">
                 <a:solidFill>
@@ -10991,14 +10297,7 @@
           </a:bodyPr>
           <a:lstStyle/>
           <a:p>
-            <a:pPr algn="r">
-              <a:spcBef>
-                <a:spcPts val="0"/>
-              </a:spcBef>
-              <a:spcAft>
-                <a:spcPts val="0"/>
-              </a:spcAft>
-            </a:pPr>
+            <a:pPr algn="r"/>
             <a:r>
               <a:rPr sz="1150" b="0" i="0">
                 <a:solidFill>
@@ -11069,14 +10368,7 @@
           </a:bodyPr>
           <a:lstStyle/>
           <a:p>
-            <a:pPr algn="l">
-              <a:spcBef>
-                <a:spcPts val="0"/>
-              </a:spcBef>
-              <a:spcAft>
-                <a:spcPts val="0"/>
-              </a:spcAft>
-            </a:pPr>
+            <a:pPr algn="l"/>
             <a:r>
               <a:rPr sz="1100" b="0" i="0">
                 <a:solidFill>
@@ -11111,14 +10403,7 @@
           </a:bodyPr>
           <a:lstStyle/>
           <a:p>
-            <a:pPr algn="r">
-              <a:spcBef>
-                <a:spcPts val="0"/>
-              </a:spcBef>
-              <a:spcAft>
-                <a:spcPts val="0"/>
-              </a:spcAft>
-            </a:pPr>
+            <a:pPr algn="r"/>
             <a:r>
               <a:rPr sz="1150" b="0" i="0">
                 <a:solidFill>
@@ -11153,14 +10438,7 @@
           </a:bodyPr>
           <a:lstStyle/>
           <a:p>
-            <a:pPr algn="r">
-              <a:spcBef>
-                <a:spcPts val="0"/>
-              </a:spcBef>
-              <a:spcAft>
-                <a:spcPts val="0"/>
-              </a:spcAft>
-            </a:pPr>
+            <a:pPr algn="r"/>
             <a:r>
               <a:rPr sz="1150" b="0" i="0">
                 <a:solidFill>
@@ -11231,14 +10509,7 @@
           </a:bodyPr>
           <a:lstStyle/>
           <a:p>
-            <a:pPr algn="l">
-              <a:spcBef>
-                <a:spcPts val="0"/>
-              </a:spcBef>
-              <a:spcAft>
-                <a:spcPts val="0"/>
-              </a:spcAft>
-            </a:pPr>
+            <a:pPr algn="l"/>
             <a:r>
               <a:rPr sz="1100" b="0" i="0">
                 <a:solidFill>
@@ -11273,14 +10544,7 @@
           </a:bodyPr>
           <a:lstStyle/>
           <a:p>
-            <a:pPr algn="r">
-              <a:spcBef>
-                <a:spcPts val="0"/>
-              </a:spcBef>
-              <a:spcAft>
-                <a:spcPts val="0"/>
-              </a:spcAft>
-            </a:pPr>
+            <a:pPr algn="r"/>
             <a:r>
               <a:rPr sz="1150" b="0" i="0">
                 <a:solidFill>
@@ -11315,14 +10579,7 @@
           </a:bodyPr>
           <a:lstStyle/>
           <a:p>
-            <a:pPr algn="r">
-              <a:spcBef>
-                <a:spcPts val="0"/>
-              </a:spcBef>
-              <a:spcAft>
-                <a:spcPts val="0"/>
-              </a:spcAft>
-            </a:pPr>
+            <a:pPr algn="r"/>
             <a:r>
               <a:rPr sz="1150" b="0" i="0">
                 <a:solidFill>
@@ -11393,14 +10650,7 @@
           </a:bodyPr>
           <a:lstStyle/>
           <a:p>
-            <a:pPr algn="l">
-              <a:spcBef>
-                <a:spcPts val="0"/>
-              </a:spcBef>
-              <a:spcAft>
-                <a:spcPts val="0"/>
-              </a:spcAft>
-            </a:pPr>
+            <a:pPr algn="l"/>
             <a:r>
               <a:rPr sz="1100" b="0" i="0">
                 <a:solidFill>
@@ -11435,14 +10685,7 @@
           </a:bodyPr>
           <a:lstStyle/>
           <a:p>
-            <a:pPr algn="r">
-              <a:spcBef>
-                <a:spcPts val="0"/>
-              </a:spcBef>
-              <a:spcAft>
-                <a:spcPts val="0"/>
-              </a:spcAft>
-            </a:pPr>
+            <a:pPr algn="r"/>
             <a:r>
               <a:rPr sz="1150" b="0" i="0">
                 <a:solidFill>
@@ -11477,14 +10720,7 @@
           </a:bodyPr>
           <a:lstStyle/>
           <a:p>
-            <a:pPr algn="r">
-              <a:spcBef>
-                <a:spcPts val="0"/>
-              </a:spcBef>
-              <a:spcAft>
-                <a:spcPts val="0"/>
-              </a:spcAft>
-            </a:pPr>
+            <a:pPr algn="r"/>
             <a:r>
               <a:rPr sz="1150" b="0" i="0">
                 <a:solidFill>
@@ -11555,14 +10791,7 @@
           </a:bodyPr>
           <a:lstStyle/>
           <a:p>
-            <a:pPr algn="l">
-              <a:spcBef>
-                <a:spcPts val="0"/>
-              </a:spcBef>
-              <a:spcAft>
-                <a:spcPts val="0"/>
-              </a:spcAft>
-            </a:pPr>
+            <a:pPr algn="l"/>
             <a:r>
               <a:rPr sz="1100" b="0" i="0">
                 <a:solidFill>
@@ -11597,14 +10826,7 @@
           </a:bodyPr>
           <a:lstStyle/>
           <a:p>
-            <a:pPr algn="r">
-              <a:spcBef>
-                <a:spcPts val="0"/>
-              </a:spcBef>
-              <a:spcAft>
-                <a:spcPts val="0"/>
-              </a:spcAft>
-            </a:pPr>
+            <a:pPr algn="r"/>
             <a:r>
               <a:rPr sz="1150" b="0" i="0">
                 <a:solidFill>
@@ -11639,14 +10861,7 @@
           </a:bodyPr>
           <a:lstStyle/>
           <a:p>
-            <a:pPr algn="r">
-              <a:spcBef>
-                <a:spcPts val="0"/>
-              </a:spcBef>
-              <a:spcAft>
-                <a:spcPts val="0"/>
-              </a:spcAft>
-            </a:pPr>
+            <a:pPr algn="r"/>
             <a:r>
               <a:rPr sz="1150" b="0" i="0">
                 <a:solidFill>
@@ -11717,14 +10932,7 @@
           </a:bodyPr>
           <a:lstStyle/>
           <a:p>
-            <a:pPr algn="l">
-              <a:spcBef>
-                <a:spcPts val="0"/>
-              </a:spcBef>
-              <a:spcAft>
-                <a:spcPts val="0"/>
-              </a:spcAft>
-            </a:pPr>
+            <a:pPr algn="l"/>
             <a:r>
               <a:rPr sz="850" b="0" i="0" spc="140">
                 <a:solidFill>
@@ -11788,14 +10996,7 @@
           </a:bodyPr>
           <a:lstStyle/>
           <a:p>
-            <a:pPr algn="l">
-              <a:spcBef>
-                <a:spcPts val="0"/>
-              </a:spcBef>
-              <a:spcAft>
-                <a:spcPts val="0"/>
-              </a:spcAft>
-            </a:pPr>
+            <a:pPr algn="l"/>
             <a:r>
               <a:rPr sz="850" b="0" i="0" spc="150">
                 <a:solidFill>
@@ -11830,14 +11031,7 @@
           </a:bodyPr>
           <a:lstStyle/>
           <a:p>
-            <a:pPr algn="r">
-              <a:spcBef>
-                <a:spcPts val="0"/>
-              </a:spcBef>
-              <a:spcAft>
-                <a:spcPts val="0"/>
-              </a:spcAft>
-            </a:pPr>
+            <a:pPr algn="r"/>
             <a:r>
               <a:rPr sz="850" b="0" i="0" spc="150">
                 <a:solidFill>
@@ -11876,12 +11070,6 @@
               <a:lnSpc>
                 <a:spcPct val="95000"/>
               </a:lnSpc>
-              <a:spcBef>
-                <a:spcPts val="0"/>
-              </a:spcBef>
-              <a:spcAft>
-                <a:spcPts val="0"/>
-              </a:spcAft>
             </a:pPr>
             <a:r>
               <a:rPr sz="6200" b="0" i="0" spc="-140">
@@ -11930,12 +11118,6 @@
               <a:lnSpc>
                 <a:spcPct val="134000"/>
               </a:lnSpc>
-              <a:spcBef>
-                <a:spcPts val="0"/>
-              </a:spcBef>
-              <a:spcAft>
-                <a:spcPts val="0"/>
-              </a:spcAft>
             </a:pPr>
             <a:r>
               <a:rPr sz="1250" b="0" i="0">
@@ -12025,14 +11207,7 @@
           </a:bodyPr>
           <a:lstStyle/>
           <a:p>
-            <a:pPr algn="l">
-              <a:spcBef>
-                <a:spcPts val="0"/>
-              </a:spcBef>
-              <a:spcAft>
-                <a:spcPts val="0"/>
-              </a:spcAft>
-            </a:pPr>
+            <a:pPr algn="l"/>
             <a:r>
               <a:rPr sz="1050" b="0" i="0">
                 <a:solidFill>
@@ -12067,14 +11242,7 @@
           </a:bodyPr>
           <a:lstStyle/>
           <a:p>
-            <a:pPr algn="r">
-              <a:spcBef>
-                <a:spcPts val="0"/>
-              </a:spcBef>
-              <a:spcAft>
-                <a:spcPts val="0"/>
-              </a:spcAft>
-            </a:pPr>
+            <a:pPr algn="r"/>
             <a:r>
               <a:rPr sz="1100" b="0" i="0">
                 <a:solidFill>
@@ -12145,14 +11313,7 @@
           </a:bodyPr>
           <a:lstStyle/>
           <a:p>
-            <a:pPr algn="l">
-              <a:spcBef>
-                <a:spcPts val="0"/>
-              </a:spcBef>
-              <a:spcAft>
-                <a:spcPts val="0"/>
-              </a:spcAft>
-            </a:pPr>
+            <a:pPr algn="l"/>
             <a:r>
               <a:rPr sz="1050" b="0" i="0">
                 <a:solidFill>
@@ -12187,14 +11348,7 @@
           </a:bodyPr>
           <a:lstStyle/>
           <a:p>
-            <a:pPr algn="r">
-              <a:spcBef>
-                <a:spcPts val="0"/>
-              </a:spcBef>
-              <a:spcAft>
-                <a:spcPts val="0"/>
-              </a:spcAft>
-            </a:pPr>
+            <a:pPr algn="r"/>
             <a:r>
               <a:rPr sz="1100" b="0" i="0">
                 <a:solidFill>
@@ -12265,14 +11419,7 @@
           </a:bodyPr>
           <a:lstStyle/>
           <a:p>
-            <a:pPr algn="l">
-              <a:spcBef>
-                <a:spcPts val="0"/>
-              </a:spcBef>
-              <a:spcAft>
-                <a:spcPts val="0"/>
-              </a:spcAft>
-            </a:pPr>
+            <a:pPr algn="l"/>
             <a:r>
               <a:rPr sz="1050" b="0" i="0">
                 <a:solidFill>
@@ -12307,14 +11454,7 @@
           </a:bodyPr>
           <a:lstStyle/>
           <a:p>
-            <a:pPr algn="r">
-              <a:spcBef>
-                <a:spcPts val="0"/>
-              </a:spcBef>
-              <a:spcAft>
-                <a:spcPts val="0"/>
-              </a:spcAft>
-            </a:pPr>
+            <a:pPr algn="r"/>
             <a:r>
               <a:rPr sz="1100" b="0" i="0">
                 <a:solidFill>
@@ -12421,14 +11561,7 @@
           </a:bodyPr>
           <a:lstStyle/>
           <a:p>
-            <a:pPr algn="l">
-              <a:spcBef>
-                <a:spcPts val="0"/>
-              </a:spcBef>
-              <a:spcAft>
-                <a:spcPts val="0"/>
-              </a:spcAft>
-            </a:pPr>
+            <a:pPr algn="l"/>
             <a:r>
               <a:rPr sz="850" b="0" i="0" spc="140">
                 <a:solidFill>
@@ -12447,9 +11580,6 @@
               <a:spcBef>
                 <a:spcPts val="400"/>
               </a:spcBef>
-              <a:spcAft>
-                <a:spcPts val="0"/>
-              </a:spcAft>
             </a:pPr>
             <a:r>
               <a:rPr sz="1150" b="0" i="0">
@@ -12637,12 +11767,6 @@
               <a:lnSpc>
                 <a:spcPct val="112000"/>
               </a:lnSpc>
-              <a:spcBef>
-                <a:spcPts val="0"/>
-              </a:spcBef>
-              <a:spcAft>
-                <a:spcPts val="0"/>
-              </a:spcAft>
             </a:pPr>
             <a:r>
               <a:rPr sz="750" b="0" i="0" spc="120">
@@ -12716,14 +11840,7 @@
           </a:bodyPr>
           <a:lstStyle/>
           <a:p>
-            <a:pPr algn="l">
-              <a:spcBef>
-                <a:spcPts val="0"/>
-              </a:spcBef>
-              <a:spcAft>
-                <a:spcPts val="0"/>
-              </a:spcAft>
-            </a:pPr>
+            <a:pPr algn="l"/>
             <a:r>
               <a:rPr sz="850" b="0" i="0" spc="150">
                 <a:solidFill>
@@ -12758,14 +11875,7 @@
           </a:bodyPr>
           <a:lstStyle/>
           <a:p>
-            <a:pPr algn="r">
-              <a:spcBef>
-                <a:spcPts val="0"/>
-              </a:spcBef>
-              <a:spcAft>
-                <a:spcPts val="0"/>
-              </a:spcAft>
-            </a:pPr>
+            <a:pPr algn="r"/>
             <a:r>
               <a:rPr sz="850" b="0" i="0" spc="150">
                 <a:solidFill>
@@ -12804,12 +11914,6 @@
               <a:lnSpc>
                 <a:spcPct val="102000"/>
               </a:lnSpc>
-              <a:spcBef>
-                <a:spcPts val="0"/>
-              </a:spcBef>
-              <a:spcAft>
-                <a:spcPts val="0"/>
-              </a:spcAft>
             </a:pPr>
             <a:r>
               <a:rPr sz="2500" b="0" i="0" spc="-30">
@@ -12849,12 +11953,6 @@
               <a:lnSpc>
                 <a:spcPct val="142000"/>
               </a:lnSpc>
-              <a:spcBef>
-                <a:spcPts val="0"/>
-              </a:spcBef>
-              <a:spcAft>
-                <a:spcPts val="0"/>
-              </a:spcAft>
             </a:pPr>
             <a:r>
               <a:rPr sz="1150" b="0" i="0">
@@ -12926,14 +12024,7 @@
           </a:bodyPr>
           <a:lstStyle/>
           <a:p>
-            <a:pPr algn="l">
-              <a:spcBef>
-                <a:spcPts val="0"/>
-              </a:spcBef>
-              <a:spcAft>
-                <a:spcPts val="0"/>
-              </a:spcAft>
-            </a:pPr>
+            <a:pPr algn="l"/>
             <a:r>
               <a:rPr sz="1050" b="0" i="0">
                 <a:solidFill>
@@ -12968,14 +12059,7 @@
           </a:bodyPr>
           <a:lstStyle/>
           <a:p>
-            <a:pPr algn="r">
-              <a:spcBef>
-                <a:spcPts val="0"/>
-              </a:spcBef>
-              <a:spcAft>
-                <a:spcPts val="0"/>
-              </a:spcAft>
-            </a:pPr>
+            <a:pPr algn="r"/>
             <a:r>
               <a:rPr sz="1100" b="0" i="0">
                 <a:solidFill>
@@ -13046,14 +12130,7 @@
           </a:bodyPr>
           <a:lstStyle/>
           <a:p>
-            <a:pPr algn="l">
-              <a:spcBef>
-                <a:spcPts val="0"/>
-              </a:spcBef>
-              <a:spcAft>
-                <a:spcPts val="0"/>
-              </a:spcAft>
-            </a:pPr>
+            <a:pPr algn="l"/>
             <a:r>
               <a:rPr sz="1050" b="0" i="0">
                 <a:solidFill>
@@ -13088,14 +12165,7 @@
           </a:bodyPr>
           <a:lstStyle/>
           <a:p>
-            <a:pPr algn="r">
-              <a:spcBef>
-                <a:spcPts val="0"/>
-              </a:spcBef>
-              <a:spcAft>
-                <a:spcPts val="0"/>
-              </a:spcAft>
-            </a:pPr>
+            <a:pPr algn="r"/>
             <a:r>
               <a:rPr sz="1100" b="0" i="0">
                 <a:solidFill>
@@ -13166,14 +12236,7 @@
           </a:bodyPr>
           <a:lstStyle/>
           <a:p>
-            <a:pPr algn="l">
-              <a:spcBef>
-                <a:spcPts val="0"/>
-              </a:spcBef>
-              <a:spcAft>
-                <a:spcPts val="0"/>
-              </a:spcAft>
-            </a:pPr>
+            <a:pPr algn="l"/>
             <a:r>
               <a:rPr sz="1050" b="0" i="0">
                 <a:solidFill>
@@ -13208,14 +12271,7 @@
           </a:bodyPr>
           <a:lstStyle/>
           <a:p>
-            <a:pPr algn="r">
-              <a:spcBef>
-                <a:spcPts val="0"/>
-              </a:spcBef>
-              <a:spcAft>
-                <a:spcPts val="0"/>
-              </a:spcAft>
-            </a:pPr>
+            <a:pPr algn="r"/>
             <a:r>
               <a:rPr sz="1100" b="0" i="0">
                 <a:solidFill>
@@ -13286,14 +12342,7 @@
           </a:bodyPr>
           <a:lstStyle/>
           <a:p>
-            <a:pPr algn="l">
-              <a:spcBef>
-                <a:spcPts val="0"/>
-              </a:spcBef>
-              <a:spcAft>
-                <a:spcPts val="0"/>
-              </a:spcAft>
-            </a:pPr>
+            <a:pPr algn="l"/>
             <a:r>
               <a:rPr sz="1050" b="0" i="0">
                 <a:solidFill>
@@ -13328,14 +12377,7 @@
           </a:bodyPr>
           <a:lstStyle/>
           <a:p>
-            <a:pPr algn="r">
-              <a:spcBef>
-                <a:spcPts val="0"/>
-              </a:spcBef>
-              <a:spcAft>
-                <a:spcPts val="0"/>
-              </a:spcAft>
-            </a:pPr>
+            <a:pPr algn="r"/>
             <a:r>
               <a:rPr sz="1100" b="0" i="0">
                 <a:solidFill>
@@ -13442,14 +12484,7 @@
           </a:bodyPr>
           <a:lstStyle/>
           <a:p>
-            <a:pPr algn="l">
-              <a:spcBef>
-                <a:spcPts val="0"/>
-              </a:spcBef>
-              <a:spcAft>
-                <a:spcPts val="0"/>
-              </a:spcAft>
-            </a:pPr>
+            <a:pPr algn="l"/>
             <a:r>
               <a:rPr sz="850" b="0" i="0" spc="140">
                 <a:solidFill>
@@ -13468,9 +12503,6 @@
               <a:spcBef>
                 <a:spcPts val="400"/>
               </a:spcBef>
-              <a:spcAft>
-                <a:spcPts val="0"/>
-              </a:spcAft>
             </a:pPr>
             <a:r>
               <a:rPr sz="1150" b="0" i="0">
@@ -13658,12 +12690,6 @@
               <a:lnSpc>
                 <a:spcPct val="112000"/>
               </a:lnSpc>
-              <a:spcBef>
-                <a:spcPts val="0"/>
-              </a:spcBef>
-              <a:spcAft>
-                <a:spcPts val="0"/>
-              </a:spcAft>
             </a:pPr>
             <a:r>
               <a:rPr sz="750" b="0" i="0" spc="120">
@@ -13737,14 +12763,7 @@
           </a:bodyPr>
           <a:lstStyle/>
           <a:p>
-            <a:pPr algn="l">
-              <a:spcBef>
-                <a:spcPts val="0"/>
-              </a:spcBef>
-              <a:spcAft>
-                <a:spcPts val="0"/>
-              </a:spcAft>
-            </a:pPr>
+            <a:pPr algn="l"/>
             <a:r>
               <a:rPr sz="850" b="0" i="0" spc="150">
                 <a:solidFill>
@@ -13779,14 +12798,7 @@
           </a:bodyPr>
           <a:lstStyle/>
           <a:p>
-            <a:pPr algn="r">
-              <a:spcBef>
-                <a:spcPts val="0"/>
-              </a:spcBef>
-              <a:spcAft>
-                <a:spcPts val="0"/>
-              </a:spcAft>
-            </a:pPr>
+            <a:pPr algn="r"/>
             <a:r>
               <a:rPr sz="850" b="0" i="0" spc="150">
                 <a:solidFill>
@@ -13825,12 +12837,6 @@
               <a:lnSpc>
                 <a:spcPct val="102000"/>
               </a:lnSpc>
-              <a:spcBef>
-                <a:spcPts val="0"/>
-              </a:spcBef>
-              <a:spcAft>
-                <a:spcPts val="0"/>
-              </a:spcAft>
             </a:pPr>
             <a:r>
               <a:rPr sz="2500" b="0" i="0" spc="-30">
@@ -13853,7 +12859,7 @@
         <p:spPr>
           <a:xfrm>
             <a:off x="658368" y="1572768"/>
-            <a:ext cx="1429512" cy="22860"/>
+            <a:ext cx="1356359" cy="22860"/>
           </a:xfrm>
           <a:prstGeom prst="rect">
             <a:avLst/>
@@ -13897,27 +12903,20 @@
         <p:spPr>
           <a:xfrm>
             <a:off x="658368" y="1700784"/>
-            <a:ext cx="1429512" cy="502920"/>
-          </a:xfrm>
-          <a:prstGeom prst="rect">
-            <a:avLst/>
-          </a:prstGeom>
-          <a:noFill/>
-        </p:spPr>
-        <p:txBody>
-          <a:bodyPr wrap="square" anchor="t" lIns="0" rIns="0" tIns="0" bIns="0">
-            <a:noAutofit/>
-          </a:bodyPr>
-          <a:lstStyle/>
-          <a:p>
-            <a:pPr algn="l">
-              <a:spcBef>
-                <a:spcPts val="0"/>
-              </a:spcBef>
-              <a:spcAft>
-                <a:spcPts val="0"/>
-              </a:spcAft>
-            </a:pPr>
+            <a:ext cx="1356359" cy="502920"/>
+          </a:xfrm>
+          <a:prstGeom prst="rect">
+            <a:avLst/>
+          </a:prstGeom>
+          <a:noFill/>
+        </p:spPr>
+        <p:txBody>
+          <a:bodyPr wrap="square" anchor="t" lIns="0" rIns="0" tIns="0" bIns="0">
+            <a:noAutofit/>
+          </a:bodyPr>
+          <a:lstStyle/>
+          <a:p>
+            <a:pPr algn="l"/>
             <a:r>
               <a:rPr sz="2500" b="0" i="0" spc="-60">
                 <a:solidFill>
@@ -13939,27 +12938,20 @@
         <p:spPr>
           <a:xfrm>
             <a:off x="658368" y="2212848"/>
-            <a:ext cx="1429512" cy="274320"/>
-          </a:xfrm>
-          <a:prstGeom prst="rect">
-            <a:avLst/>
-          </a:prstGeom>
-          <a:noFill/>
-        </p:spPr>
-        <p:txBody>
-          <a:bodyPr wrap="square" anchor="t" lIns="0" rIns="0" tIns="0" bIns="0">
-            <a:noAutofit/>
-          </a:bodyPr>
-          <a:lstStyle/>
-          <a:p>
-            <a:pPr algn="l">
-              <a:spcBef>
-                <a:spcPts val="0"/>
-              </a:spcBef>
-              <a:spcAft>
-                <a:spcPts val="0"/>
-              </a:spcAft>
-            </a:pPr>
+            <a:ext cx="1356359" cy="274320"/>
+          </a:xfrm>
+          <a:prstGeom prst="rect">
+            <a:avLst/>
+          </a:prstGeom>
+          <a:noFill/>
+        </p:spPr>
+        <p:txBody>
+          <a:bodyPr wrap="square" anchor="t" lIns="0" rIns="0" tIns="0" bIns="0">
+            <a:noAutofit/>
+          </a:bodyPr>
+          <a:lstStyle/>
+          <a:p>
+            <a:pPr algn="l"/>
             <a:r>
               <a:rPr sz="1000" b="0" i="0">
                 <a:solidFill>
@@ -13980,30 +12972,23 @@
         </p:nvSpPr>
         <p:spPr>
           <a:xfrm>
-            <a:off x="658368" y="2450592"/>
-            <a:ext cx="1429512" cy="274320"/>
-          </a:xfrm>
-          <a:prstGeom prst="rect">
-            <a:avLst/>
-          </a:prstGeom>
-          <a:noFill/>
-        </p:spPr>
-        <p:txBody>
-          <a:bodyPr wrap="square" anchor="t" lIns="0" rIns="0" tIns="0" bIns="0">
-            <a:noAutofit/>
-          </a:bodyPr>
-          <a:lstStyle/>
-          <a:p>
-            <a:pPr algn="l">
-              <a:spcBef>
-                <a:spcPts val="0"/>
-              </a:spcBef>
-              <a:spcAft>
-                <a:spcPts val="0"/>
-              </a:spcAft>
-            </a:pPr>
-            <a:r>
-              <a:rPr sz="700" b="0" i="0" spc="100">
+            <a:off x="658368" y="2487168"/>
+            <a:ext cx="1356359" cy="274320"/>
+          </a:xfrm>
+          <a:prstGeom prst="rect">
+            <a:avLst/>
+          </a:prstGeom>
+          <a:noFill/>
+        </p:spPr>
+        <p:txBody>
+          <a:bodyPr wrap="square" anchor="t" lIns="0" rIns="0" tIns="0" bIns="0">
+            <a:noAutofit/>
+          </a:bodyPr>
+          <a:lstStyle/>
+          <a:p>
+            <a:pPr algn="l"/>
+            <a:r>
+              <a:rPr sz="700" b="0" i="0" spc="120">
                 <a:solidFill>
                   <a:srgbClr val="8C8375"/>
                 </a:solidFill>
@@ -14023,7 +13008,7 @@
         <p:spPr>
           <a:xfrm>
             <a:off x="2289047" y="1572768"/>
-            <a:ext cx="1429512" cy="22860"/>
+            <a:ext cx="1356359" cy="22860"/>
           </a:xfrm>
           <a:prstGeom prst="rect">
             <a:avLst/>
@@ -14067,27 +13052,20 @@
         <p:spPr>
           <a:xfrm>
             <a:off x="2289047" y="1700784"/>
-            <a:ext cx="1429512" cy="502920"/>
-          </a:xfrm>
-          <a:prstGeom prst="rect">
-            <a:avLst/>
-          </a:prstGeom>
-          <a:noFill/>
-        </p:spPr>
-        <p:txBody>
-          <a:bodyPr wrap="square" anchor="t" lIns="0" rIns="0" tIns="0" bIns="0">
-            <a:noAutofit/>
-          </a:bodyPr>
-          <a:lstStyle/>
-          <a:p>
-            <a:pPr algn="l">
-              <a:spcBef>
-                <a:spcPts val="0"/>
-              </a:spcBef>
-              <a:spcAft>
-                <a:spcPts val="0"/>
-              </a:spcAft>
-            </a:pPr>
+            <a:ext cx="1356359" cy="502920"/>
+          </a:xfrm>
+          <a:prstGeom prst="rect">
+            <a:avLst/>
+          </a:prstGeom>
+          <a:noFill/>
+        </p:spPr>
+        <p:txBody>
+          <a:bodyPr wrap="square" anchor="t" lIns="0" rIns="0" tIns="0" bIns="0">
+            <a:noAutofit/>
+          </a:bodyPr>
+          <a:lstStyle/>
+          <a:p>
+            <a:pPr algn="l"/>
             <a:r>
               <a:rPr sz="2500" b="0" i="0" spc="-60">
                 <a:solidFill>
@@ -14109,27 +13087,20 @@
         <p:spPr>
           <a:xfrm>
             <a:off x="2289047" y="2212848"/>
-            <a:ext cx="1429512" cy="274320"/>
-          </a:xfrm>
-          <a:prstGeom prst="rect">
-            <a:avLst/>
-          </a:prstGeom>
-          <a:noFill/>
-        </p:spPr>
-        <p:txBody>
-          <a:bodyPr wrap="square" anchor="t" lIns="0" rIns="0" tIns="0" bIns="0">
-            <a:noAutofit/>
-          </a:bodyPr>
-          <a:lstStyle/>
-          <a:p>
-            <a:pPr algn="l">
-              <a:spcBef>
-                <a:spcPts val="0"/>
-              </a:spcBef>
-              <a:spcAft>
-                <a:spcPts val="0"/>
-              </a:spcAft>
-            </a:pPr>
+            <a:ext cx="1356359" cy="274320"/>
+          </a:xfrm>
+          <a:prstGeom prst="rect">
+            <a:avLst/>
+          </a:prstGeom>
+          <a:noFill/>
+        </p:spPr>
+        <p:txBody>
+          <a:bodyPr wrap="square" anchor="t" lIns="0" rIns="0" tIns="0" bIns="0">
+            <a:noAutofit/>
+          </a:bodyPr>
+          <a:lstStyle/>
+          <a:p>
+            <a:pPr algn="l"/>
             <a:r>
               <a:rPr sz="1000" b="0" i="0">
                 <a:solidFill>
@@ -14150,30 +13121,23 @@
         </p:nvSpPr>
         <p:spPr>
           <a:xfrm>
-            <a:off x="2289047" y="2450592"/>
-            <a:ext cx="1429512" cy="274320"/>
-          </a:xfrm>
-          <a:prstGeom prst="rect">
-            <a:avLst/>
-          </a:prstGeom>
-          <a:noFill/>
-        </p:spPr>
-        <p:txBody>
-          <a:bodyPr wrap="square" anchor="t" lIns="0" rIns="0" tIns="0" bIns="0">
-            <a:noAutofit/>
-          </a:bodyPr>
-          <a:lstStyle/>
-          <a:p>
-            <a:pPr algn="l">
-              <a:spcBef>
-                <a:spcPts val="0"/>
-              </a:spcBef>
-              <a:spcAft>
-                <a:spcPts val="0"/>
-              </a:spcAft>
-            </a:pPr>
-            <a:r>
-              <a:rPr sz="700" b="0" i="0" spc="100">
+            <a:off x="2289047" y="2487168"/>
+            <a:ext cx="1356359" cy="274320"/>
+          </a:xfrm>
+          <a:prstGeom prst="rect">
+            <a:avLst/>
+          </a:prstGeom>
+          <a:noFill/>
+        </p:spPr>
+        <p:txBody>
+          <a:bodyPr wrap="square" anchor="t" lIns="0" rIns="0" tIns="0" bIns="0">
+            <a:noAutofit/>
+          </a:bodyPr>
+          <a:lstStyle/>
+          <a:p>
+            <a:pPr algn="l"/>
+            <a:r>
+              <a:rPr sz="700" b="0" i="0" spc="120">
                 <a:solidFill>
                   <a:srgbClr val="8C8375"/>
                 </a:solidFill>
@@ -14193,7 +13157,7 @@
         <p:spPr>
           <a:xfrm>
             <a:off x="3919727" y="1572768"/>
-            <a:ext cx="1429512" cy="22860"/>
+            <a:ext cx="1356359" cy="22860"/>
           </a:xfrm>
           <a:prstGeom prst="rect">
             <a:avLst/>
@@ -14237,27 +13201,20 @@
         <p:spPr>
           <a:xfrm>
             <a:off x="3919727" y="1700784"/>
-            <a:ext cx="1429512" cy="502920"/>
-          </a:xfrm>
-          <a:prstGeom prst="rect">
-            <a:avLst/>
-          </a:prstGeom>
-          <a:noFill/>
-        </p:spPr>
-        <p:txBody>
-          <a:bodyPr wrap="square" anchor="t" lIns="0" rIns="0" tIns="0" bIns="0">
-            <a:noAutofit/>
-          </a:bodyPr>
-          <a:lstStyle/>
-          <a:p>
-            <a:pPr algn="l">
-              <a:spcBef>
-                <a:spcPts val="0"/>
-              </a:spcBef>
-              <a:spcAft>
-                <a:spcPts val="0"/>
-              </a:spcAft>
-            </a:pPr>
+            <a:ext cx="1356359" cy="502920"/>
+          </a:xfrm>
+          <a:prstGeom prst="rect">
+            <a:avLst/>
+          </a:prstGeom>
+          <a:noFill/>
+        </p:spPr>
+        <p:txBody>
+          <a:bodyPr wrap="square" anchor="t" lIns="0" rIns="0" tIns="0" bIns="0">
+            <a:noAutofit/>
+          </a:bodyPr>
+          <a:lstStyle/>
+          <a:p>
+            <a:pPr algn="l"/>
             <a:r>
               <a:rPr sz="2500" b="0" i="0" spc="-60">
                 <a:solidFill>
@@ -14279,27 +13236,20 @@
         <p:spPr>
           <a:xfrm>
             <a:off x="3919727" y="2212848"/>
-            <a:ext cx="1429512" cy="274320"/>
-          </a:xfrm>
-          <a:prstGeom prst="rect">
-            <a:avLst/>
-          </a:prstGeom>
-          <a:noFill/>
-        </p:spPr>
-        <p:txBody>
-          <a:bodyPr wrap="square" anchor="t" lIns="0" rIns="0" tIns="0" bIns="0">
-            <a:noAutofit/>
-          </a:bodyPr>
-          <a:lstStyle/>
-          <a:p>
-            <a:pPr algn="l">
-              <a:spcBef>
-                <a:spcPts val="0"/>
-              </a:spcBef>
-              <a:spcAft>
-                <a:spcPts val="0"/>
-              </a:spcAft>
-            </a:pPr>
+            <a:ext cx="1356359" cy="274320"/>
+          </a:xfrm>
+          <a:prstGeom prst="rect">
+            <a:avLst/>
+          </a:prstGeom>
+          <a:noFill/>
+        </p:spPr>
+        <p:txBody>
+          <a:bodyPr wrap="square" anchor="t" lIns="0" rIns="0" tIns="0" bIns="0">
+            <a:noAutofit/>
+          </a:bodyPr>
+          <a:lstStyle/>
+          <a:p>
+            <a:pPr algn="l"/>
             <a:r>
               <a:rPr sz="1000" b="0" i="0">
                 <a:solidFill>
@@ -14320,30 +13270,23 @@
         </p:nvSpPr>
         <p:spPr>
           <a:xfrm>
-            <a:off x="3919727" y="2450592"/>
-            <a:ext cx="1429512" cy="274320"/>
-          </a:xfrm>
-          <a:prstGeom prst="rect">
-            <a:avLst/>
-          </a:prstGeom>
-          <a:noFill/>
-        </p:spPr>
-        <p:txBody>
-          <a:bodyPr wrap="square" anchor="t" lIns="0" rIns="0" tIns="0" bIns="0">
-            <a:noAutofit/>
-          </a:bodyPr>
-          <a:lstStyle/>
-          <a:p>
-            <a:pPr algn="l">
-              <a:spcBef>
-                <a:spcPts val="0"/>
-              </a:spcBef>
-              <a:spcAft>
-                <a:spcPts val="0"/>
-              </a:spcAft>
-            </a:pPr>
-            <a:r>
-              <a:rPr sz="700" b="0" i="0" spc="100">
+            <a:off x="3919727" y="2487168"/>
+            <a:ext cx="1356359" cy="274320"/>
+          </a:xfrm>
+          <a:prstGeom prst="rect">
+            <a:avLst/>
+          </a:prstGeom>
+          <a:noFill/>
+        </p:spPr>
+        <p:txBody>
+          <a:bodyPr wrap="square" anchor="t" lIns="0" rIns="0" tIns="0" bIns="0">
+            <a:noAutofit/>
+          </a:bodyPr>
+          <a:lstStyle/>
+          <a:p>
+            <a:pPr algn="l"/>
+            <a:r>
+              <a:rPr sz="700" b="0" i="0" spc="120">
                 <a:solidFill>
                   <a:srgbClr val="8C8375"/>
                 </a:solidFill>
@@ -14380,12 +13323,6 @@
               <a:lnSpc>
                 <a:spcPct val="142000"/>
               </a:lnSpc>
-              <a:spcBef>
-                <a:spcPts val="0"/>
-              </a:spcBef>
-              <a:spcAft>
-                <a:spcPts val="0"/>
-              </a:spcAft>
             </a:pPr>
             <a:r>
               <a:rPr sz="1150" b="0" i="0">
@@ -14457,14 +13394,7 @@
           </a:bodyPr>
           <a:lstStyle/>
           <a:p>
-            <a:pPr algn="l">
-              <a:spcBef>
-                <a:spcPts val="0"/>
-              </a:spcBef>
-              <a:spcAft>
-                <a:spcPts val="0"/>
-              </a:spcAft>
-            </a:pPr>
+            <a:pPr algn="l"/>
             <a:r>
               <a:rPr sz="850" b="0" i="0" spc="140">
                 <a:solidFill>
@@ -14483,9 +13413,6 @@
               <a:spcBef>
                 <a:spcPts val="400"/>
               </a:spcBef>
-              <a:spcAft>
-                <a:spcPts val="0"/>
-              </a:spcAft>
             </a:pPr>
             <a:r>
               <a:rPr sz="1150" b="0" i="0">
@@ -14673,12 +13600,6 @@
               <a:lnSpc>
                 <a:spcPct val="112000"/>
               </a:lnSpc>
-              <a:spcBef>
-                <a:spcPts val="0"/>
-              </a:spcBef>
-              <a:spcAft>
-                <a:spcPts val="0"/>
-              </a:spcAft>
             </a:pPr>
             <a:r>
               <a:rPr sz="750" b="0" i="0" spc="120">
@@ -14752,14 +13673,7 @@
           </a:bodyPr>
           <a:lstStyle/>
           <a:p>
-            <a:pPr algn="l">
-              <a:spcBef>
-                <a:spcPts val="0"/>
-              </a:spcBef>
-              <a:spcAft>
-                <a:spcPts val="0"/>
-              </a:spcAft>
-            </a:pPr>
+            <a:pPr algn="l"/>
             <a:r>
               <a:rPr sz="850" b="0" i="0" spc="150">
                 <a:solidFill>
@@ -14794,14 +13708,7 @@
           </a:bodyPr>
           <a:lstStyle/>
           <a:p>
-            <a:pPr algn="r">
-              <a:spcBef>
-                <a:spcPts val="0"/>
-              </a:spcBef>
-              <a:spcAft>
-                <a:spcPts val="0"/>
-              </a:spcAft>
-            </a:pPr>
+            <a:pPr algn="r"/>
             <a:r>
               <a:rPr sz="850" b="0" i="0" spc="150">
                 <a:solidFill>
@@ -14840,12 +13747,6 @@
               <a:lnSpc>
                 <a:spcPct val="108000"/>
               </a:lnSpc>
-              <a:spcBef>
-                <a:spcPts val="0"/>
-              </a:spcBef>
-              <a:spcAft>
-                <a:spcPts val="0"/>
-              </a:spcAft>
             </a:pPr>
             <a:r>
               <a:rPr sz="2800" b="0" i="0" spc="-50">
@@ -14862,12 +13763,6 @@
               <a:lnSpc>
                 <a:spcPct val="108000"/>
               </a:lnSpc>
-              <a:spcBef>
-                <a:spcPts val="0"/>
-              </a:spcBef>
-              <a:spcAft>
-                <a:spcPts val="0"/>
-              </a:spcAft>
             </a:pPr>
             <a:r>
               <a:rPr sz="2800" b="0" i="0" spc="-50">
@@ -14939,14 +13834,7 @@
           </a:bodyPr>
           <a:lstStyle/>
           <a:p>
-            <a:pPr algn="l">
-              <a:spcBef>
-                <a:spcPts val="0"/>
-              </a:spcBef>
-              <a:spcAft>
-                <a:spcPts val="0"/>
-              </a:spcAft>
-            </a:pPr>
+            <a:pPr algn="l"/>
             <a:r>
               <a:rPr sz="1050" b="0" i="0">
                 <a:solidFill>
@@ -14981,14 +13869,7 @@
           </a:bodyPr>
           <a:lstStyle/>
           <a:p>
-            <a:pPr algn="r">
-              <a:spcBef>
-                <a:spcPts val="0"/>
-              </a:spcBef>
-              <a:spcAft>
-                <a:spcPts val="0"/>
-              </a:spcAft>
-            </a:pPr>
+            <a:pPr algn="r"/>
             <a:r>
               <a:rPr sz="1100" b="0" i="0">
                 <a:solidFill>
@@ -15059,14 +13940,7 @@
           </a:bodyPr>
           <a:lstStyle/>
           <a:p>
-            <a:pPr algn="l">
-              <a:spcBef>
-                <a:spcPts val="0"/>
-              </a:spcBef>
-              <a:spcAft>
-                <a:spcPts val="0"/>
-              </a:spcAft>
-            </a:pPr>
+            <a:pPr algn="l"/>
             <a:r>
               <a:rPr sz="1050" b="0" i="0">
                 <a:solidFill>
@@ -15101,14 +13975,7 @@
           </a:bodyPr>
           <a:lstStyle/>
           <a:p>
-            <a:pPr algn="r">
-              <a:spcBef>
-                <a:spcPts val="0"/>
-              </a:spcBef>
-              <a:spcAft>
-                <a:spcPts val="0"/>
-              </a:spcAft>
-            </a:pPr>
+            <a:pPr algn="r"/>
             <a:r>
               <a:rPr sz="1100" b="0" i="0">
                 <a:solidFill>
@@ -15179,14 +14046,7 @@
           </a:bodyPr>
           <a:lstStyle/>
           <a:p>
-            <a:pPr algn="l">
-              <a:spcBef>
-                <a:spcPts val="0"/>
-              </a:spcBef>
-              <a:spcAft>
-                <a:spcPts val="0"/>
-              </a:spcAft>
-            </a:pPr>
+            <a:pPr algn="l"/>
             <a:r>
               <a:rPr sz="1050" b="0" i="0">
                 <a:solidFill>
@@ -15221,14 +14081,7 @@
           </a:bodyPr>
           <a:lstStyle/>
           <a:p>
-            <a:pPr algn="r">
-              <a:spcBef>
-                <a:spcPts val="0"/>
-              </a:spcBef>
-              <a:spcAft>
-                <a:spcPts val="0"/>
-              </a:spcAft>
-            </a:pPr>
+            <a:pPr algn="r"/>
             <a:r>
               <a:rPr sz="1100" b="0" i="0">
                 <a:solidFill>
@@ -15299,14 +14152,7 @@
           </a:bodyPr>
           <a:lstStyle/>
           <a:p>
-            <a:pPr algn="l">
-              <a:spcBef>
-                <a:spcPts val="0"/>
-              </a:spcBef>
-              <a:spcAft>
-                <a:spcPts val="0"/>
-              </a:spcAft>
-            </a:pPr>
+            <a:pPr algn="l"/>
             <a:r>
               <a:rPr sz="1050" b="0" i="0">
                 <a:solidFill>
@@ -15341,14 +14187,7 @@
           </a:bodyPr>
           <a:lstStyle/>
           <a:p>
-            <a:pPr algn="r">
-              <a:spcBef>
-                <a:spcPts val="0"/>
-              </a:spcBef>
-              <a:spcAft>
-                <a:spcPts val="0"/>
-              </a:spcAft>
-            </a:pPr>
+            <a:pPr algn="r"/>
             <a:r>
               <a:rPr sz="1100" b="0" i="0">
                 <a:solidFill>
@@ -15419,14 +14258,7 @@
           </a:bodyPr>
           <a:lstStyle/>
           <a:p>
-            <a:pPr algn="l">
-              <a:spcBef>
-                <a:spcPts val="0"/>
-              </a:spcBef>
-              <a:spcAft>
-                <a:spcPts val="0"/>
-              </a:spcAft>
-            </a:pPr>
+            <a:pPr algn="l"/>
             <a:r>
               <a:rPr sz="850" b="0" i="0" spc="140">
                 <a:solidFill>
@@ -15613,12 +14445,6 @@
               <a:lnSpc>
                 <a:spcPct val="112000"/>
               </a:lnSpc>
-              <a:spcBef>
-                <a:spcPts val="0"/>
-              </a:spcBef>
-              <a:spcAft>
-                <a:spcPts val="0"/>
-              </a:spcAft>
             </a:pPr>
             <a:r>
               <a:rPr sz="750" b="0" i="0" spc="120">
@@ -15692,14 +14518,7 @@
           </a:bodyPr>
           <a:lstStyle/>
           <a:p>
-            <a:pPr algn="l">
-              <a:spcBef>
-                <a:spcPts val="0"/>
-              </a:spcBef>
-              <a:spcAft>
-                <a:spcPts val="0"/>
-              </a:spcAft>
-            </a:pPr>
+            <a:pPr algn="l"/>
             <a:r>
               <a:rPr sz="850" b="0" i="0" spc="150">
                 <a:solidFill>
@@ -15734,14 +14553,7 @@
           </a:bodyPr>
           <a:lstStyle/>
           <a:p>
-            <a:pPr algn="r">
-              <a:spcBef>
-                <a:spcPts val="0"/>
-              </a:spcBef>
-              <a:spcAft>
-                <a:spcPts val="0"/>
-              </a:spcAft>
-            </a:pPr>
+            <a:pPr algn="r"/>
             <a:r>
               <a:rPr sz="850" b="0" i="0" spc="150">
                 <a:solidFill>
@@ -15780,12 +14592,6 @@
               <a:lnSpc>
                 <a:spcPct val="102000"/>
               </a:lnSpc>
-              <a:spcBef>
-                <a:spcPts val="0"/>
-              </a:spcBef>
-              <a:spcAft>
-                <a:spcPts val="0"/>
-              </a:spcAft>
             </a:pPr>
             <a:r>
               <a:rPr sz="2600" b="0" i="0" spc="-30">
@@ -15865,14 +14671,7 @@
           </a:bodyPr>
           <a:lstStyle/>
           <a:p>
-            <a:pPr algn="l">
-              <a:spcBef>
-                <a:spcPts val="0"/>
-              </a:spcBef>
-              <a:spcAft>
-                <a:spcPts val="0"/>
-              </a:spcAft>
-            </a:pPr>
+            <a:pPr algn="l"/>
             <a:r>
               <a:rPr sz="850" b="0" i="0" spc="150">
                 <a:solidFill>
@@ -15907,14 +14706,7 @@
           </a:bodyPr>
           <a:lstStyle/>
           <a:p>
-            <a:pPr algn="l">
-              <a:spcBef>
-                <a:spcPts val="0"/>
-              </a:spcBef>
-              <a:spcAft>
-                <a:spcPts val="0"/>
-              </a:spcAft>
-            </a:pPr>
+            <a:pPr algn="l"/>
             <a:r>
               <a:rPr sz="1300" b="0" i="0" spc="-10">
                 <a:solidFill>
@@ -15953,12 +14745,6 @@
               <a:lnSpc>
                 <a:spcPct val="120000"/>
               </a:lnSpc>
-              <a:spcBef>
-                <a:spcPts val="0"/>
-              </a:spcBef>
-              <a:spcAft>
-                <a:spcPts val="0"/>
-              </a:spcAft>
             </a:pPr>
             <a:r>
               <a:rPr sz="1050" b="0" i="0">
@@ -16038,14 +14824,7 @@
           </a:bodyPr>
           <a:lstStyle/>
           <a:p>
-            <a:pPr algn="l">
-              <a:spcBef>
-                <a:spcPts val="0"/>
-              </a:spcBef>
-              <a:spcAft>
-                <a:spcPts val="0"/>
-              </a:spcAft>
-            </a:pPr>
+            <a:pPr algn="l"/>
             <a:r>
               <a:rPr sz="850" b="0" i="0" spc="150">
                 <a:solidFill>
@@ -16080,14 +14859,7 @@
           </a:bodyPr>
           <a:lstStyle/>
           <a:p>
-            <a:pPr algn="l">
-              <a:spcBef>
-                <a:spcPts val="0"/>
-              </a:spcBef>
-              <a:spcAft>
-                <a:spcPts val="0"/>
-              </a:spcAft>
-            </a:pPr>
+            <a:pPr algn="l"/>
             <a:r>
               <a:rPr sz="1300" b="0" i="0" spc="-10">
                 <a:solidFill>
@@ -16126,12 +14898,6 @@
               <a:lnSpc>
                 <a:spcPct val="120000"/>
               </a:lnSpc>
-              <a:spcBef>
-                <a:spcPts val="0"/>
-              </a:spcBef>
-              <a:spcAft>
-                <a:spcPts val="0"/>
-              </a:spcAft>
             </a:pPr>
             <a:r>
               <a:rPr sz="1050" b="0" i="0">
@@ -16211,14 +14977,7 @@
           </a:bodyPr>
           <a:lstStyle/>
           <a:p>
-            <a:pPr algn="l">
-              <a:spcBef>
-                <a:spcPts val="0"/>
-              </a:spcBef>
-              <a:spcAft>
-                <a:spcPts val="0"/>
-              </a:spcAft>
-            </a:pPr>
+            <a:pPr algn="l"/>
             <a:r>
               <a:rPr sz="850" b="0" i="0" spc="150">
                 <a:solidFill>
@@ -16253,14 +15012,7 @@
           </a:bodyPr>
           <a:lstStyle/>
           <a:p>
-            <a:pPr algn="l">
-              <a:spcBef>
-                <a:spcPts val="0"/>
-              </a:spcBef>
-              <a:spcAft>
-                <a:spcPts val="0"/>
-              </a:spcAft>
-            </a:pPr>
+            <a:pPr algn="l"/>
             <a:r>
               <a:rPr sz="1300" b="0" i="0" spc="-10">
                 <a:solidFill>
@@ -16299,12 +15051,6 @@
               <a:lnSpc>
                 <a:spcPct val="120000"/>
               </a:lnSpc>
-              <a:spcBef>
-                <a:spcPts val="0"/>
-              </a:spcBef>
-              <a:spcAft>
-                <a:spcPts val="0"/>
-              </a:spcAft>
             </a:pPr>
             <a:r>
               <a:rPr sz="1050" b="0" i="0">
@@ -16384,14 +15130,7 @@
           </a:bodyPr>
           <a:lstStyle/>
           <a:p>
-            <a:pPr algn="l">
-              <a:spcBef>
-                <a:spcPts val="0"/>
-              </a:spcBef>
-              <a:spcAft>
-                <a:spcPts val="0"/>
-              </a:spcAft>
-            </a:pPr>
+            <a:pPr algn="l"/>
             <a:r>
               <a:rPr sz="850" b="0" i="0" spc="150">
                 <a:solidFill>
@@ -16426,14 +15165,7 @@
           </a:bodyPr>
           <a:lstStyle/>
           <a:p>
-            <a:pPr algn="l">
-              <a:spcBef>
-                <a:spcPts val="0"/>
-              </a:spcBef>
-              <a:spcAft>
-                <a:spcPts val="0"/>
-              </a:spcAft>
-            </a:pPr>
+            <a:pPr algn="l"/>
             <a:r>
               <a:rPr sz="1300" b="0" i="0" spc="-10">
                 <a:solidFill>
@@ -16472,12 +15204,6 @@
               <a:lnSpc>
                 <a:spcPct val="120000"/>
               </a:lnSpc>
-              <a:spcBef>
-                <a:spcPts val="0"/>
-              </a:spcBef>
-              <a:spcAft>
-                <a:spcPts val="0"/>
-              </a:spcAft>
             </a:pPr>
             <a:r>
               <a:rPr sz="1050" b="0" i="0">
@@ -16557,14 +15283,7 @@
           </a:bodyPr>
           <a:lstStyle/>
           <a:p>
-            <a:pPr algn="l">
-              <a:spcBef>
-                <a:spcPts val="0"/>
-              </a:spcBef>
-              <a:spcAft>
-                <a:spcPts val="0"/>
-              </a:spcAft>
-            </a:pPr>
+            <a:pPr algn="l"/>
             <a:r>
               <a:rPr sz="850" b="0" i="0" spc="150">
                 <a:solidFill>
@@ -16599,14 +15318,7 @@
           </a:bodyPr>
           <a:lstStyle/>
           <a:p>
-            <a:pPr algn="l">
-              <a:spcBef>
-                <a:spcPts val="0"/>
-              </a:spcBef>
-              <a:spcAft>
-                <a:spcPts val="0"/>
-              </a:spcAft>
-            </a:pPr>
+            <a:pPr algn="l"/>
             <a:r>
               <a:rPr sz="1300" b="0" i="0" spc="-10">
                 <a:solidFill>
@@ -16645,12 +15357,6 @@
               <a:lnSpc>
                 <a:spcPct val="120000"/>
               </a:lnSpc>
-              <a:spcBef>
-                <a:spcPts val="0"/>
-              </a:spcBef>
-              <a:spcAft>
-                <a:spcPts val="0"/>
-              </a:spcAft>
             </a:pPr>
             <a:r>
               <a:rPr sz="1050" b="0" i="0">
@@ -16730,14 +15436,7 @@
           </a:bodyPr>
           <a:lstStyle/>
           <a:p>
-            <a:pPr algn="l">
-              <a:spcBef>
-                <a:spcPts val="0"/>
-              </a:spcBef>
-              <a:spcAft>
-                <a:spcPts val="0"/>
-              </a:spcAft>
-            </a:pPr>
+            <a:pPr algn="l"/>
             <a:r>
               <a:rPr sz="850" b="0" i="0" spc="150">
                 <a:solidFill>
@@ -16772,14 +15471,7 @@
           </a:bodyPr>
           <a:lstStyle/>
           <a:p>
-            <a:pPr algn="l">
-              <a:spcBef>
-                <a:spcPts val="0"/>
-              </a:spcBef>
-              <a:spcAft>
-                <a:spcPts val="0"/>
-              </a:spcAft>
-            </a:pPr>
+            <a:pPr algn="l"/>
             <a:r>
               <a:rPr sz="1300" b="0" i="0" spc="-10">
                 <a:solidFill>
@@ -16818,12 +15510,6 @@
               <a:lnSpc>
                 <a:spcPct val="120000"/>
               </a:lnSpc>
-              <a:spcBef>
-                <a:spcPts val="0"/>
-              </a:spcBef>
-              <a:spcAft>
-                <a:spcPts val="0"/>
-              </a:spcAft>
             </a:pPr>
             <a:r>
               <a:rPr sz="1050" b="0" i="0">
@@ -16903,14 +15589,7 @@
           </a:bodyPr>
           <a:lstStyle/>
           <a:p>
-            <a:pPr algn="l">
-              <a:spcBef>
-                <a:spcPts val="0"/>
-              </a:spcBef>
-              <a:spcAft>
-                <a:spcPts val="0"/>
-              </a:spcAft>
-            </a:pPr>
+            <a:pPr algn="l"/>
             <a:r>
               <a:rPr sz="850" b="0" i="0" spc="150">
                 <a:solidFill>
@@ -16945,14 +15624,7 @@
           </a:bodyPr>
           <a:lstStyle/>
           <a:p>
-            <a:pPr algn="l">
-              <a:spcBef>
-                <a:spcPts val="0"/>
-              </a:spcBef>
-              <a:spcAft>
-                <a:spcPts val="0"/>
-              </a:spcAft>
-            </a:pPr>
+            <a:pPr algn="l"/>
             <a:r>
               <a:rPr sz="1300" b="0" i="0" spc="-10">
                 <a:solidFill>
@@ -16991,12 +15663,6 @@
               <a:lnSpc>
                 <a:spcPct val="120000"/>
               </a:lnSpc>
-              <a:spcBef>
-                <a:spcPts val="0"/>
-              </a:spcBef>
-              <a:spcAft>
-                <a:spcPts val="0"/>
-              </a:spcAft>
             </a:pPr>
             <a:r>
               <a:rPr sz="1050" b="0" i="0">
@@ -17076,14 +15742,7 @@
           </a:bodyPr>
           <a:lstStyle/>
           <a:p>
-            <a:pPr algn="l">
-              <a:spcBef>
-                <a:spcPts val="0"/>
-              </a:spcBef>
-              <a:spcAft>
-                <a:spcPts val="0"/>
-              </a:spcAft>
-            </a:pPr>
+            <a:pPr algn="l"/>
             <a:r>
               <a:rPr sz="850" b="0" i="0" spc="150">
                 <a:solidFill>
@@ -17118,14 +15777,7 @@
           </a:bodyPr>
           <a:lstStyle/>
           <a:p>
-            <a:pPr algn="l">
-              <a:spcBef>
-                <a:spcPts val="0"/>
-              </a:spcBef>
-              <a:spcAft>
-                <a:spcPts val="0"/>
-              </a:spcAft>
-            </a:pPr>
+            <a:pPr algn="l"/>
             <a:r>
               <a:rPr sz="1300" b="0" i="0" spc="-10">
                 <a:solidFill>
@@ -17164,12 +15816,6 @@
               <a:lnSpc>
                 <a:spcPct val="120000"/>
               </a:lnSpc>
-              <a:spcBef>
-                <a:spcPts val="0"/>
-              </a:spcBef>
-              <a:spcAft>
-                <a:spcPts val="0"/>
-              </a:spcAft>
             </a:pPr>
             <a:r>
               <a:rPr sz="1050" b="0" i="0">
@@ -17205,14 +15851,7 @@
           </a:bodyPr>
           <a:lstStyle/>
           <a:p>
-            <a:pPr algn="l">
-              <a:spcBef>
-                <a:spcPts val="0"/>
-              </a:spcBef>
-              <a:spcAft>
-                <a:spcPts val="0"/>
-              </a:spcAft>
-            </a:pPr>
+            <a:pPr algn="l"/>
             <a:r>
               <a:rPr sz="850" b="0" i="0" spc="140">
                 <a:solidFill>
@@ -17276,14 +15915,7 @@
           </a:bodyPr>
           <a:lstStyle/>
           <a:p>
-            <a:pPr algn="l">
-              <a:spcBef>
-                <a:spcPts val="0"/>
-              </a:spcBef>
-              <a:spcAft>
-                <a:spcPts val="0"/>
-              </a:spcAft>
-            </a:pPr>
+            <a:pPr algn="l"/>
             <a:r>
               <a:rPr sz="850" b="0" i="0" spc="150">
                 <a:solidFill>
@@ -17318,14 +15950,7 @@
           </a:bodyPr>
           <a:lstStyle/>
           <a:p>
-            <a:pPr algn="r">
-              <a:spcBef>
-                <a:spcPts val="0"/>
-              </a:spcBef>
-              <a:spcAft>
-                <a:spcPts val="0"/>
-              </a:spcAft>
-            </a:pPr>
+            <a:pPr algn="r"/>
             <a:r>
               <a:rPr sz="850" b="0" i="0" spc="150">
                 <a:solidFill>
@@ -17364,12 +15989,6 @@
               <a:lnSpc>
                 <a:spcPct val="102000"/>
               </a:lnSpc>
-              <a:spcBef>
-                <a:spcPts val="0"/>
-              </a:spcBef>
-              <a:spcAft>
-                <a:spcPts val="0"/>
-              </a:spcAft>
             </a:pPr>
             <a:r>
               <a:rPr sz="2500" b="0" i="0" spc="-30">
@@ -17409,12 +16028,6 @@
               <a:lnSpc>
                 <a:spcPct val="142000"/>
               </a:lnSpc>
-              <a:spcBef>
-                <a:spcPts val="0"/>
-              </a:spcBef>
-              <a:spcAft>
-                <a:spcPts val="0"/>
-              </a:spcAft>
             </a:pPr>
             <a:r>
               <a:rPr sz="1150" b="0" i="0">
@@ -17486,14 +16099,7 @@
           </a:bodyPr>
           <a:lstStyle/>
           <a:p>
-            <a:pPr algn="l">
-              <a:spcBef>
-                <a:spcPts val="0"/>
-              </a:spcBef>
-              <a:spcAft>
-                <a:spcPts val="0"/>
-              </a:spcAft>
-            </a:pPr>
+            <a:pPr algn="l"/>
             <a:r>
               <a:rPr sz="1050" b="0" i="0">
                 <a:solidFill>
@@ -17528,14 +16134,7 @@
           </a:bodyPr>
           <a:lstStyle/>
           <a:p>
-            <a:pPr algn="r">
-              <a:spcBef>
-                <a:spcPts val="0"/>
-              </a:spcBef>
-              <a:spcAft>
-                <a:spcPts val="0"/>
-              </a:spcAft>
-            </a:pPr>
+            <a:pPr algn="r"/>
             <a:r>
               <a:rPr sz="1100" b="0" i="0">
                 <a:solidFill>
@@ -17606,14 +16205,7 @@
           </a:bodyPr>
           <a:lstStyle/>
           <a:p>
-            <a:pPr algn="l">
-              <a:spcBef>
-                <a:spcPts val="0"/>
-              </a:spcBef>
-              <a:spcAft>
-                <a:spcPts val="0"/>
-              </a:spcAft>
-            </a:pPr>
+            <a:pPr algn="l"/>
             <a:r>
               <a:rPr sz="1050" b="0" i="0">
                 <a:solidFill>
@@ -17648,14 +16240,7 @@
           </a:bodyPr>
           <a:lstStyle/>
           <a:p>
-            <a:pPr algn="r">
-              <a:spcBef>
-                <a:spcPts val="0"/>
-              </a:spcBef>
-              <a:spcAft>
-                <a:spcPts val="0"/>
-              </a:spcAft>
-            </a:pPr>
+            <a:pPr algn="r"/>
             <a:r>
               <a:rPr sz="1100" b="0" i="0">
                 <a:solidFill>
@@ -17726,14 +16311,7 @@
           </a:bodyPr>
           <a:lstStyle/>
           <a:p>
-            <a:pPr algn="l">
-              <a:spcBef>
-                <a:spcPts val="0"/>
-              </a:spcBef>
-              <a:spcAft>
-                <a:spcPts val="0"/>
-              </a:spcAft>
-            </a:pPr>
+            <a:pPr algn="l"/>
             <a:r>
               <a:rPr sz="1050" b="0" i="0">
                 <a:solidFill>
@@ -17768,14 +16346,7 @@
           </a:bodyPr>
           <a:lstStyle/>
           <a:p>
-            <a:pPr algn="r">
-              <a:spcBef>
-                <a:spcPts val="0"/>
-              </a:spcBef>
-              <a:spcAft>
-                <a:spcPts val="0"/>
-              </a:spcAft>
-            </a:pPr>
+            <a:pPr algn="r"/>
             <a:r>
               <a:rPr sz="1100" b="0" i="0">
                 <a:solidFill>
@@ -17882,14 +16453,7 @@
           </a:bodyPr>
           <a:lstStyle/>
           <a:p>
-            <a:pPr algn="l">
-              <a:spcBef>
-                <a:spcPts val="0"/>
-              </a:spcBef>
-              <a:spcAft>
-                <a:spcPts val="0"/>
-              </a:spcAft>
-            </a:pPr>
+            <a:pPr algn="l"/>
             <a:r>
               <a:rPr sz="850" b="0" i="0" spc="140">
                 <a:solidFill>
@@ -17908,9 +16472,6 @@
               <a:spcBef>
                 <a:spcPts val="400"/>
               </a:spcBef>
-              <a:spcAft>
-                <a:spcPts val="0"/>
-              </a:spcAft>
             </a:pPr>
             <a:r>
               <a:rPr sz="1150" b="0" i="0">
@@ -18098,12 +16659,6 @@
               <a:lnSpc>
                 <a:spcPct val="112000"/>
               </a:lnSpc>
-              <a:spcBef>
-                <a:spcPts val="0"/>
-              </a:spcBef>
-              <a:spcAft>
-                <a:spcPts val="0"/>
-              </a:spcAft>
             </a:pPr>
             <a:r>
               <a:rPr sz="750" b="0" i="0" spc="120">
@@ -18177,14 +16732,7 @@
           </a:bodyPr>
           <a:lstStyle/>
           <a:p>
-            <a:pPr algn="l">
-              <a:spcBef>
-                <a:spcPts val="0"/>
-              </a:spcBef>
-              <a:spcAft>
-                <a:spcPts val="0"/>
-              </a:spcAft>
-            </a:pPr>
+            <a:pPr algn="l"/>
             <a:r>
               <a:rPr sz="850" b="0" i="0" spc="150">
                 <a:solidFill>
@@ -18219,14 +16767,7 @@
           </a:bodyPr>
           <a:lstStyle/>
           <a:p>
-            <a:pPr algn="r">
-              <a:spcBef>
-                <a:spcPts val="0"/>
-              </a:spcBef>
-              <a:spcAft>
-                <a:spcPts val="0"/>
-              </a:spcAft>
-            </a:pPr>
+            <a:pPr algn="r"/>
             <a:r>
               <a:rPr sz="850" b="0" i="0" spc="150">
                 <a:solidFill>
@@ -18265,12 +16806,6 @@
               <a:lnSpc>
                 <a:spcPct val="95000"/>
               </a:lnSpc>
-              <a:spcBef>
-                <a:spcPts val="0"/>
-              </a:spcBef>
-              <a:spcAft>
-                <a:spcPts val="0"/>
-              </a:spcAft>
             </a:pPr>
             <a:r>
               <a:rPr sz="5800" b="0" i="0" spc="-140">
@@ -18319,12 +16854,6 @@
               <a:lnSpc>
                 <a:spcPct val="134000"/>
               </a:lnSpc>
-              <a:spcBef>
-                <a:spcPts val="0"/>
-              </a:spcBef>
-              <a:spcAft>
-                <a:spcPts val="0"/>
-              </a:spcAft>
             </a:pPr>
             <a:r>
               <a:rPr sz="1250" b="0" i="0">
@@ -18414,14 +16943,7 @@
           </a:bodyPr>
           <a:lstStyle/>
           <a:p>
-            <a:pPr algn="l">
-              <a:spcBef>
-                <a:spcPts val="0"/>
-              </a:spcBef>
-              <a:spcAft>
-                <a:spcPts val="0"/>
-              </a:spcAft>
-            </a:pPr>
+            <a:pPr algn="l"/>
             <a:r>
               <a:rPr sz="1050" b="0" i="0">
                 <a:solidFill>
@@ -18456,14 +16978,7 @@
           </a:bodyPr>
           <a:lstStyle/>
           <a:p>
-            <a:pPr algn="r">
-              <a:spcBef>
-                <a:spcPts val="0"/>
-              </a:spcBef>
-              <a:spcAft>
-                <a:spcPts val="0"/>
-              </a:spcAft>
-            </a:pPr>
+            <a:pPr algn="r"/>
             <a:r>
               <a:rPr sz="1100" b="0" i="0">
                 <a:solidFill>
@@ -18534,14 +17049,7 @@
           </a:bodyPr>
           <a:lstStyle/>
           <a:p>
-            <a:pPr algn="l">
-              <a:spcBef>
-                <a:spcPts val="0"/>
-              </a:spcBef>
-              <a:spcAft>
-                <a:spcPts val="0"/>
-              </a:spcAft>
-            </a:pPr>
+            <a:pPr algn="l"/>
             <a:r>
               <a:rPr sz="1050" b="0" i="0">
                 <a:solidFill>
@@ -18576,14 +17084,7 @@
           </a:bodyPr>
           <a:lstStyle/>
           <a:p>
-            <a:pPr algn="r">
-              <a:spcBef>
-                <a:spcPts val="0"/>
-              </a:spcBef>
-              <a:spcAft>
-                <a:spcPts val="0"/>
-              </a:spcAft>
-            </a:pPr>
+            <a:pPr algn="r"/>
             <a:r>
               <a:rPr sz="1100" b="0" i="0">
                 <a:solidFill>
@@ -18654,14 +17155,7 @@
           </a:bodyPr>
           <a:lstStyle/>
           <a:p>
-            <a:pPr algn="l">
-              <a:spcBef>
-                <a:spcPts val="0"/>
-              </a:spcBef>
-              <a:spcAft>
-                <a:spcPts val="0"/>
-              </a:spcAft>
-            </a:pPr>
+            <a:pPr algn="l"/>
             <a:r>
               <a:rPr sz="1050" b="0" i="0">
                 <a:solidFill>
@@ -18696,14 +17190,7 @@
           </a:bodyPr>
           <a:lstStyle/>
           <a:p>
-            <a:pPr algn="r">
-              <a:spcBef>
-                <a:spcPts val="0"/>
-              </a:spcBef>
-              <a:spcAft>
-                <a:spcPts val="0"/>
-              </a:spcAft>
-            </a:pPr>
+            <a:pPr algn="r"/>
             <a:r>
               <a:rPr sz="1100" b="0" i="0">
                 <a:solidFill>
@@ -18774,14 +17261,7 @@
           </a:bodyPr>
           <a:lstStyle/>
           <a:p>
-            <a:pPr algn="l">
-              <a:spcBef>
-                <a:spcPts val="0"/>
-              </a:spcBef>
-              <a:spcAft>
-                <a:spcPts val="0"/>
-              </a:spcAft>
-            </a:pPr>
+            <a:pPr algn="l"/>
             <a:r>
               <a:rPr sz="1050" b="0" i="0">
                 <a:solidFill>
@@ -18816,14 +17296,7 @@
           </a:bodyPr>
           <a:lstStyle/>
           <a:p>
-            <a:pPr algn="r">
-              <a:spcBef>
-                <a:spcPts val="0"/>
-              </a:spcBef>
-              <a:spcAft>
-                <a:spcPts val="0"/>
-              </a:spcAft>
-            </a:pPr>
+            <a:pPr algn="r"/>
             <a:r>
               <a:rPr sz="1100" b="0" i="0">
                 <a:solidFill>
@@ -18930,14 +17403,7 @@
           </a:bodyPr>
           <a:lstStyle/>
           <a:p>
-            <a:pPr algn="l">
-              <a:spcBef>
-                <a:spcPts val="0"/>
-              </a:spcBef>
-              <a:spcAft>
-                <a:spcPts val="0"/>
-              </a:spcAft>
-            </a:pPr>
+            <a:pPr algn="l"/>
             <a:r>
               <a:rPr sz="850" b="0" i="0" spc="140">
                 <a:solidFill>
@@ -18956,9 +17422,6 @@
               <a:spcBef>
                 <a:spcPts val="400"/>
               </a:spcBef>
-              <a:spcAft>
-                <a:spcPts val="0"/>
-              </a:spcAft>
             </a:pPr>
             <a:r>
               <a:rPr sz="1150" b="0" i="0">
@@ -19146,12 +17609,6 @@
               <a:lnSpc>
                 <a:spcPct val="112000"/>
               </a:lnSpc>
-              <a:spcBef>
-                <a:spcPts val="0"/>
-              </a:spcBef>
-              <a:spcAft>
-                <a:spcPts val="0"/>
-              </a:spcAft>
             </a:pPr>
             <a:r>
               <a:rPr sz="750" b="0" i="0" spc="120">
@@ -19225,14 +17682,7 @@
           </a:bodyPr>
           <a:lstStyle/>
           <a:p>
-            <a:pPr algn="l">
-              <a:spcBef>
-                <a:spcPts val="0"/>
-              </a:spcBef>
-              <a:spcAft>
-                <a:spcPts val="0"/>
-              </a:spcAft>
-            </a:pPr>
+            <a:pPr algn="l"/>
             <a:r>
               <a:rPr sz="850" b="0" i="0" spc="150">
                 <a:solidFill>
@@ -19267,14 +17717,7 @@
           </a:bodyPr>
           <a:lstStyle/>
           <a:p>
-            <a:pPr algn="r">
-              <a:spcBef>
-                <a:spcPts val="0"/>
-              </a:spcBef>
-              <a:spcAft>
-                <a:spcPts val="0"/>
-              </a:spcAft>
-            </a:pPr>
+            <a:pPr algn="r"/>
             <a:r>
               <a:rPr sz="850" b="0" i="0" spc="150">
                 <a:solidFill>
@@ -19313,12 +17756,6 @@
               <a:lnSpc>
                 <a:spcPct val="102000"/>
               </a:lnSpc>
-              <a:spcBef>
-                <a:spcPts val="0"/>
-              </a:spcBef>
-              <a:spcAft>
-                <a:spcPts val="0"/>
-              </a:spcAft>
             </a:pPr>
             <a:r>
               <a:rPr sz="2500" b="0" i="0" spc="-30">
@@ -19358,12 +17795,6 @@
               <a:lnSpc>
                 <a:spcPct val="142000"/>
               </a:lnSpc>
-              <a:spcBef>
-                <a:spcPts val="0"/>
-              </a:spcBef>
-              <a:spcAft>
-                <a:spcPts val="0"/>
-              </a:spcAft>
             </a:pPr>
             <a:r>
               <a:rPr sz="1150" b="0" i="0">
@@ -19435,18 +17866,11 @@
           </a:bodyPr>
           <a:lstStyle/>
           <a:p>
-            <a:pPr algn="l">
-              <a:spcBef>
-                <a:spcPts val="0"/>
-              </a:spcBef>
-              <a:spcAft>
-                <a:spcPts val="0"/>
-              </a:spcAft>
-            </a:pPr>
+            <a:pPr algn="l"/>
             <a:r>
               <a:rPr sz="850" b="0" i="0" spc="140">
                 <a:solidFill>
-                  <a:srgbClr val="A8102F"/>
+                  <a:srgbClr val="5B5347"/>
                 </a:solidFill>
                 <a:latin typeface="Consolas"/>
               </a:rPr>
@@ -19461,14 +17885,11 @@
               <a:spcBef>
                 <a:spcPts val="400"/>
               </a:spcBef>
-              <a:spcAft>
-                <a:spcPts val="0"/>
-              </a:spcAft>
             </a:pPr>
             <a:r>
               <a:rPr sz="1100" b="0" i="0">
                 <a:solidFill>
-                  <a:srgbClr val="5B5347"/>
+                  <a:srgbClr val="16130F"/>
                 </a:solidFill>
                 <a:latin typeface="Georgia"/>
               </a:rPr>
@@ -19651,12 +18072,6 @@
               <a:lnSpc>
                 <a:spcPct val="112000"/>
               </a:lnSpc>
-              <a:spcBef>
-                <a:spcPts val="0"/>
-              </a:spcBef>
-              <a:spcAft>
-                <a:spcPts val="0"/>
-              </a:spcAft>
             </a:pPr>
             <a:r>
               <a:rPr sz="750" b="0" i="0" spc="120">
@@ -19730,14 +18145,7 @@
           </a:bodyPr>
           <a:lstStyle/>
           <a:p>
-            <a:pPr algn="l">
-              <a:spcBef>
-                <a:spcPts val="0"/>
-              </a:spcBef>
-              <a:spcAft>
-                <a:spcPts val="0"/>
-              </a:spcAft>
-            </a:pPr>
+            <a:pPr algn="l"/>
             <a:r>
               <a:rPr sz="15000" b="0" i="0" spc="-600">
                 <a:ln w="20000">
@@ -19813,14 +18221,7 @@
           </a:bodyPr>
           <a:lstStyle/>
           <a:p>
-            <a:pPr algn="l">
-              <a:spcBef>
-                <a:spcPts val="0"/>
-              </a:spcBef>
-              <a:spcAft>
-                <a:spcPts val="0"/>
-              </a:spcAft>
-            </a:pPr>
+            <a:pPr algn="l"/>
             <a:r>
               <a:rPr sz="850" b="0" i="0" spc="150">
                 <a:solidFill>
@@ -19859,12 +18260,6 @@
               <a:lnSpc>
                 <a:spcPct val="103000"/>
               </a:lnSpc>
-              <a:spcBef>
-                <a:spcPts val="0"/>
-              </a:spcBef>
-              <a:spcAft>
-                <a:spcPts val="0"/>
-              </a:spcAft>
             </a:pPr>
             <a:r>
               <a:rPr sz="4000" b="0" i="0" spc="-60">
@@ -19904,12 +18299,6 @@
               <a:lnSpc>
                 <a:spcPct val="135000"/>
               </a:lnSpc>
-              <a:spcBef>
-                <a:spcPts val="0"/>
-              </a:spcBef>
-              <a:spcAft>
-                <a:spcPts val="0"/>
-              </a:spcAft>
             </a:pPr>
             <a:r>
               <a:rPr sz="1250" b="0" i="0">
@@ -19945,14 +18334,7 @@
           </a:bodyPr>
           <a:lstStyle/>
           <a:p>
-            <a:pPr algn="r">
-              <a:spcBef>
-                <a:spcPts val="0"/>
-              </a:spcBef>
-              <a:spcAft>
-                <a:spcPts val="0"/>
-              </a:spcAft>
-            </a:pPr>
+            <a:pPr algn="r"/>
             <a:r>
               <a:rPr sz="850" b="0" i="0" spc="150">
                 <a:solidFill>
@@ -20016,14 +18398,7 @@
           </a:bodyPr>
           <a:lstStyle/>
           <a:p>
-            <a:pPr algn="l">
-              <a:spcBef>
-                <a:spcPts val="0"/>
-              </a:spcBef>
-              <a:spcAft>
-                <a:spcPts val="0"/>
-              </a:spcAft>
-            </a:pPr>
+            <a:pPr algn="l"/>
             <a:r>
               <a:rPr sz="850" b="0" i="0" spc="150">
                 <a:solidFill>
@@ -20058,14 +18433,7 @@
           </a:bodyPr>
           <a:lstStyle/>
           <a:p>
-            <a:pPr algn="r">
-              <a:spcBef>
-                <a:spcPts val="0"/>
-              </a:spcBef>
-              <a:spcAft>
-                <a:spcPts val="0"/>
-              </a:spcAft>
-            </a:pPr>
+            <a:pPr algn="r"/>
             <a:r>
               <a:rPr sz="850" b="0" i="0" spc="150">
                 <a:solidFill>
@@ -20104,12 +18472,6 @@
               <a:lnSpc>
                 <a:spcPct val="102000"/>
               </a:lnSpc>
-              <a:spcBef>
-                <a:spcPts val="0"/>
-              </a:spcBef>
-              <a:spcAft>
-                <a:spcPts val="0"/>
-              </a:spcAft>
             </a:pPr>
             <a:r>
               <a:rPr sz="2400" b="0" i="0" spc="-30">
@@ -20181,14 +18543,7 @@
           </a:bodyPr>
           <a:lstStyle/>
           <a:p>
-            <a:pPr algn="l">
-              <a:spcBef>
-                <a:spcPts val="0"/>
-              </a:spcBef>
-              <a:spcAft>
-                <a:spcPts val="0"/>
-              </a:spcAft>
-            </a:pPr>
+            <a:pPr algn="l"/>
             <a:r>
               <a:rPr sz="1100" b="0" i="0">
                 <a:solidFill>
@@ -20223,14 +18578,7 @@
           </a:bodyPr>
           <a:lstStyle/>
           <a:p>
-            <a:pPr algn="l">
-              <a:spcBef>
-                <a:spcPts val="0"/>
-              </a:spcBef>
-              <a:spcAft>
-                <a:spcPts val="0"/>
-              </a:spcAft>
-            </a:pPr>
+            <a:pPr algn="l"/>
             <a:r>
               <a:rPr sz="1100" b="0" i="0">
                 <a:solidFill>
@@ -20265,14 +18613,7 @@
           </a:bodyPr>
           <a:lstStyle/>
           <a:p>
-            <a:pPr algn="r">
-              <a:spcBef>
-                <a:spcPts val="0"/>
-              </a:spcBef>
-              <a:spcAft>
-                <a:spcPts val="0"/>
-              </a:spcAft>
-            </a:pPr>
+            <a:pPr algn="r"/>
             <a:r>
               <a:rPr sz="1100" b="0" i="0">
                 <a:solidFill>
@@ -20343,14 +18684,7 @@
           </a:bodyPr>
           <a:lstStyle/>
           <a:p>
-            <a:pPr algn="l">
-              <a:spcBef>
-                <a:spcPts val="0"/>
-              </a:spcBef>
-              <a:spcAft>
-                <a:spcPts val="0"/>
-              </a:spcAft>
-            </a:pPr>
+            <a:pPr algn="l"/>
             <a:r>
               <a:rPr sz="1100" b="0" i="0">
                 <a:solidFill>
@@ -20385,14 +18719,7 @@
           </a:bodyPr>
           <a:lstStyle/>
           <a:p>
-            <a:pPr algn="l">
-              <a:spcBef>
-                <a:spcPts val="0"/>
-              </a:spcBef>
-              <a:spcAft>
-                <a:spcPts val="0"/>
-              </a:spcAft>
-            </a:pPr>
+            <a:pPr algn="l"/>
             <a:r>
               <a:rPr sz="1100" b="0" i="0">
                 <a:solidFill>
@@ -20427,14 +18754,7 @@
           </a:bodyPr>
           <a:lstStyle/>
           <a:p>
-            <a:pPr algn="r">
-              <a:spcBef>
-                <a:spcPts val="0"/>
-              </a:spcBef>
-              <a:spcAft>
-                <a:spcPts val="0"/>
-              </a:spcAft>
-            </a:pPr>
+            <a:pPr algn="r"/>
             <a:r>
               <a:rPr sz="1100" b="0" i="0">
                 <a:solidFill>
@@ -20505,14 +18825,7 @@
           </a:bodyPr>
           <a:lstStyle/>
           <a:p>
-            <a:pPr algn="l">
-              <a:spcBef>
-                <a:spcPts val="0"/>
-              </a:spcBef>
-              <a:spcAft>
-                <a:spcPts val="0"/>
-              </a:spcAft>
-            </a:pPr>
+            <a:pPr algn="l"/>
             <a:r>
               <a:rPr sz="1100" b="0" i="0">
                 <a:solidFill>
@@ -20547,14 +18860,7 @@
           </a:bodyPr>
           <a:lstStyle/>
           <a:p>
-            <a:pPr algn="l">
-              <a:spcBef>
-                <a:spcPts val="0"/>
-              </a:spcBef>
-              <a:spcAft>
-                <a:spcPts val="0"/>
-              </a:spcAft>
-            </a:pPr>
+            <a:pPr algn="l"/>
             <a:r>
               <a:rPr sz="1100" b="0" i="0">
                 <a:solidFill>
@@ -20589,14 +18895,7 @@
           </a:bodyPr>
           <a:lstStyle/>
           <a:p>
-            <a:pPr algn="r">
-              <a:spcBef>
-                <a:spcPts val="0"/>
-              </a:spcBef>
-              <a:spcAft>
-                <a:spcPts val="0"/>
-              </a:spcAft>
-            </a:pPr>
+            <a:pPr algn="r"/>
             <a:r>
               <a:rPr sz="1100" b="0" i="0">
                 <a:solidFill>
@@ -20667,14 +18966,7 @@
           </a:bodyPr>
           <a:lstStyle/>
           <a:p>
-            <a:pPr algn="l">
-              <a:spcBef>
-                <a:spcPts val="0"/>
-              </a:spcBef>
-              <a:spcAft>
-                <a:spcPts val="0"/>
-              </a:spcAft>
-            </a:pPr>
+            <a:pPr algn="l"/>
             <a:r>
               <a:rPr sz="1100" b="0" i="0">
                 <a:solidFill>
@@ -20709,14 +19001,7 @@
           </a:bodyPr>
           <a:lstStyle/>
           <a:p>
-            <a:pPr algn="l">
-              <a:spcBef>
-                <a:spcPts val="0"/>
-              </a:spcBef>
-              <a:spcAft>
-                <a:spcPts val="0"/>
-              </a:spcAft>
-            </a:pPr>
+            <a:pPr algn="l"/>
             <a:r>
               <a:rPr sz="1100" b="0" i="0">
                 <a:solidFill>
@@ -20751,14 +19036,7 @@
           </a:bodyPr>
           <a:lstStyle/>
           <a:p>
-            <a:pPr algn="r">
-              <a:spcBef>
-                <a:spcPts val="0"/>
-              </a:spcBef>
-              <a:spcAft>
-                <a:spcPts val="0"/>
-              </a:spcAft>
-            </a:pPr>
+            <a:pPr algn="r"/>
             <a:r>
               <a:rPr sz="1100" b="0" i="0">
                 <a:solidFill>
@@ -20829,14 +19107,7 @@
           </a:bodyPr>
           <a:lstStyle/>
           <a:p>
-            <a:pPr algn="l">
-              <a:spcBef>
-                <a:spcPts val="0"/>
-              </a:spcBef>
-              <a:spcAft>
-                <a:spcPts val="0"/>
-              </a:spcAft>
-            </a:pPr>
+            <a:pPr algn="l"/>
             <a:r>
               <a:rPr sz="1100" b="0" i="0">
                 <a:solidFill>
@@ -20871,14 +19142,7 @@
           </a:bodyPr>
           <a:lstStyle/>
           <a:p>
-            <a:pPr algn="l">
-              <a:spcBef>
-                <a:spcPts val="0"/>
-              </a:spcBef>
-              <a:spcAft>
-                <a:spcPts val="0"/>
-              </a:spcAft>
-            </a:pPr>
+            <a:pPr algn="l"/>
             <a:r>
               <a:rPr sz="1100" b="0" i="0">
                 <a:solidFill>
@@ -20913,14 +19177,7 @@
           </a:bodyPr>
           <a:lstStyle/>
           <a:p>
-            <a:pPr algn="r">
-              <a:spcBef>
-                <a:spcPts val="0"/>
-              </a:spcBef>
-              <a:spcAft>
-                <a:spcPts val="0"/>
-              </a:spcAft>
-            </a:pPr>
+            <a:pPr algn="r"/>
             <a:r>
               <a:rPr sz="1100" b="0" i="0">
                 <a:solidFill>
@@ -21035,14 +19292,7 @@
           </a:bodyPr>
           <a:lstStyle/>
           <a:p>
-            <a:pPr algn="l">
-              <a:spcBef>
-                <a:spcPts val="0"/>
-              </a:spcBef>
-              <a:spcAft>
-                <a:spcPts val="0"/>
-              </a:spcAft>
-            </a:pPr>
+            <a:pPr algn="l"/>
             <a:r>
               <a:rPr sz="1100" b="0" i="0">
                 <a:solidFill>
@@ -21077,14 +19327,7 @@
           </a:bodyPr>
           <a:lstStyle/>
           <a:p>
-            <a:pPr algn="l">
-              <a:spcBef>
-                <a:spcPts val="0"/>
-              </a:spcBef>
-              <a:spcAft>
-                <a:spcPts val="0"/>
-              </a:spcAft>
-            </a:pPr>
+            <a:pPr algn="l"/>
             <a:r>
               <a:rPr sz="1100" b="1" i="0">
                 <a:solidFill>
@@ -21119,14 +19362,7 @@
           </a:bodyPr>
           <a:lstStyle/>
           <a:p>
-            <a:pPr algn="r">
-              <a:spcBef>
-                <a:spcPts val="0"/>
-              </a:spcBef>
-              <a:spcAft>
-                <a:spcPts val="0"/>
-              </a:spcAft>
-            </a:pPr>
+            <a:pPr algn="r"/>
             <a:r>
               <a:rPr sz="1100" b="0" i="0">
                 <a:solidFill>
@@ -21233,14 +19469,7 @@
           </a:bodyPr>
           <a:lstStyle/>
           <a:p>
-            <a:pPr algn="l">
-              <a:spcBef>
-                <a:spcPts val="0"/>
-              </a:spcBef>
-              <a:spcAft>
-                <a:spcPts val="0"/>
-              </a:spcAft>
-            </a:pPr>
+            <a:pPr algn="l"/>
             <a:r>
               <a:rPr sz="850" b="0" i="0" spc="140">
                 <a:solidFill>
@@ -21259,9 +19488,6 @@
               <a:spcBef>
                 <a:spcPts val="400"/>
               </a:spcBef>
-              <a:spcAft>
-                <a:spcPts val="0"/>
-              </a:spcAft>
             </a:pPr>
             <a:r>
               <a:rPr sz="1300" b="0" i="0">
@@ -21326,14 +19552,7 @@
           </a:bodyPr>
           <a:lstStyle/>
           <a:p>
-            <a:pPr algn="l">
-              <a:spcBef>
-                <a:spcPts val="0"/>
-              </a:spcBef>
-              <a:spcAft>
-                <a:spcPts val="0"/>
-              </a:spcAft>
-            </a:pPr>
+            <a:pPr algn="l"/>
             <a:r>
               <a:rPr sz="850" b="0" i="0" spc="150">
                 <a:solidFill>
@@ -21368,14 +19587,7 @@
           </a:bodyPr>
           <a:lstStyle/>
           <a:p>
-            <a:pPr algn="r">
-              <a:spcBef>
-                <a:spcPts val="0"/>
-              </a:spcBef>
-              <a:spcAft>
-                <a:spcPts val="0"/>
-              </a:spcAft>
-            </a:pPr>
+            <a:pPr algn="r"/>
             <a:r>
               <a:rPr sz="850" b="0" i="0" spc="150">
                 <a:solidFill>
@@ -21414,12 +19626,6 @@
               <a:lnSpc>
                 <a:spcPct val="102000"/>
               </a:lnSpc>
-              <a:spcBef>
-                <a:spcPts val="0"/>
-              </a:spcBef>
-              <a:spcAft>
-                <a:spcPts val="0"/>
-              </a:spcAft>
             </a:pPr>
             <a:r>
               <a:rPr sz="2500" b="0" i="0" spc="-30">
@@ -21455,14 +19661,7 @@
           </a:bodyPr>
           <a:lstStyle/>
           <a:p>
-            <a:pPr algn="l">
-              <a:spcBef>
-                <a:spcPts val="0"/>
-              </a:spcBef>
-              <a:spcAft>
-                <a:spcPts val="0"/>
-              </a:spcAft>
-            </a:pPr>
+            <a:pPr algn="l"/>
             <a:r>
               <a:rPr sz="750" b="0" i="0" spc="120">
                 <a:solidFill>
@@ -21501,12 +19700,6 @@
               <a:lnSpc>
                 <a:spcPct val="132000"/>
               </a:lnSpc>
-              <a:spcBef>
-                <a:spcPts val="0"/>
-              </a:spcBef>
-              <a:spcAft>
-                <a:spcPts val="0"/>
-              </a:spcAft>
             </a:pPr>
             <a:r>
               <a:rPr sz="1100" b="0" i="0">
@@ -21542,14 +19735,7 @@
           </a:bodyPr>
           <a:lstStyle/>
           <a:p>
-            <a:pPr algn="l">
-              <a:spcBef>
-                <a:spcPts val="0"/>
-              </a:spcBef>
-              <a:spcAft>
-                <a:spcPts val="0"/>
-              </a:spcAft>
-            </a:pPr>
+            <a:pPr algn="l"/>
             <a:r>
               <a:rPr sz="750" b="0" i="0" spc="120">
                 <a:solidFill>
@@ -21588,12 +19774,6 @@
               <a:lnSpc>
                 <a:spcPct val="132000"/>
               </a:lnSpc>
-              <a:spcBef>
-                <a:spcPts val="0"/>
-              </a:spcBef>
-              <a:spcAft>
-                <a:spcPts val="0"/>
-              </a:spcAft>
             </a:pPr>
             <a:r>
               <a:rPr sz="1100" b="0" i="0">
@@ -21629,14 +19809,7 @@
           </a:bodyPr>
           <a:lstStyle/>
           <a:p>
-            <a:pPr algn="l">
-              <a:spcBef>
-                <a:spcPts val="0"/>
-              </a:spcBef>
-              <a:spcAft>
-                <a:spcPts val="0"/>
-              </a:spcAft>
-            </a:pPr>
+            <a:pPr algn="l"/>
             <a:r>
               <a:rPr sz="750" b="0" i="0" spc="120">
                 <a:solidFill>
@@ -21675,12 +19848,6 @@
               <a:lnSpc>
                 <a:spcPct val="132000"/>
               </a:lnSpc>
-              <a:spcBef>
-                <a:spcPts val="0"/>
-              </a:spcBef>
-              <a:spcAft>
-                <a:spcPts val="0"/>
-              </a:spcAft>
             </a:pPr>
             <a:r>
               <a:rPr sz="1100" b="0" i="0">
@@ -21716,14 +19883,7 @@
           </a:bodyPr>
           <a:lstStyle/>
           <a:p>
-            <a:pPr algn="l">
-              <a:spcBef>
-                <a:spcPts val="0"/>
-              </a:spcBef>
-              <a:spcAft>
-                <a:spcPts val="0"/>
-              </a:spcAft>
-            </a:pPr>
+            <a:pPr algn="l"/>
             <a:r>
               <a:rPr sz="750" b="0" i="0" spc="120">
                 <a:solidFill>
@@ -21762,12 +19922,6 @@
               <a:lnSpc>
                 <a:spcPct val="132000"/>
               </a:lnSpc>
-              <a:spcBef>
-                <a:spcPts val="0"/>
-              </a:spcBef>
-              <a:spcAft>
-                <a:spcPts val="0"/>
-              </a:spcAft>
             </a:pPr>
             <a:r>
               <a:rPr sz="1100" b="0" i="0">
@@ -21891,14 +20045,7 @@
           </a:bodyPr>
           <a:lstStyle/>
           <a:p>
-            <a:pPr algn="l">
-              <a:spcBef>
-                <a:spcPts val="0"/>
-              </a:spcBef>
-              <a:spcAft>
-                <a:spcPts val="0"/>
-              </a:spcAft>
-            </a:pPr>
+            <a:pPr algn="l"/>
             <a:r>
               <a:rPr sz="850" b="0" i="0" spc="150">
                 <a:solidFill>
@@ -21917,9 +20064,6 @@
               <a:spcBef>
                 <a:spcPts val="800"/>
               </a:spcBef>
-              <a:spcAft>
-                <a:spcPts val="0"/>
-              </a:spcAft>
             </a:pPr>
             <a:r>
               <a:rPr sz="1250" b="0" i="0">
@@ -21991,14 +20135,7 @@
           </a:bodyPr>
           <a:lstStyle/>
           <a:p>
-            <a:pPr algn="l">
-              <a:spcBef>
-                <a:spcPts val="0"/>
-              </a:spcBef>
-              <a:spcAft>
-                <a:spcPts val="0"/>
-              </a:spcAft>
-            </a:pPr>
+            <a:pPr algn="l"/>
             <a:r>
               <a:rPr sz="850" b="0" i="0" spc="140">
                 <a:solidFill>
@@ -22062,14 +20199,7 @@
           </a:bodyPr>
           <a:lstStyle/>
           <a:p>
-            <a:pPr algn="l">
-              <a:spcBef>
-                <a:spcPts val="0"/>
-              </a:spcBef>
-              <a:spcAft>
-                <a:spcPts val="0"/>
-              </a:spcAft>
-            </a:pPr>
+            <a:pPr algn="l"/>
             <a:r>
               <a:rPr sz="850" b="0" i="0" spc="150">
                 <a:solidFill>
@@ -22104,14 +20234,7 @@
           </a:bodyPr>
           <a:lstStyle/>
           <a:p>
-            <a:pPr algn="r">
-              <a:spcBef>
-                <a:spcPts val="0"/>
-              </a:spcBef>
-              <a:spcAft>
-                <a:spcPts val="0"/>
-              </a:spcAft>
-            </a:pPr>
+            <a:pPr algn="r"/>
             <a:r>
               <a:rPr sz="850" b="0" i="0" spc="150">
                 <a:solidFill>
@@ -22194,12 +20317,6 @@
               <a:lnSpc>
                 <a:spcPct val="104000"/>
               </a:lnSpc>
-              <a:spcBef>
-                <a:spcPts val="0"/>
-              </a:spcBef>
-              <a:spcAft>
-                <a:spcPts val="0"/>
-              </a:spcAft>
             </a:pPr>
             <a:r>
               <a:rPr sz="4200" b="0" i="0" spc="-90">
@@ -22216,12 +20333,6 @@
               <a:lnSpc>
                 <a:spcPct val="104000"/>
               </a:lnSpc>
-              <a:spcBef>
-                <a:spcPts val="0"/>
-              </a:spcBef>
-              <a:spcAft>
-                <a:spcPts val="0"/>
-              </a:spcAft>
             </a:pPr>
             <a:r>
               <a:rPr sz="4200" b="0" i="0" spc="-90">
@@ -22279,12 +20390,6 @@
               <a:lnSpc>
                 <a:spcPct val="140000"/>
               </a:lnSpc>
-              <a:spcBef>
-                <a:spcPts val="0"/>
-              </a:spcBef>
-              <a:spcAft>
-                <a:spcPts val="0"/>
-              </a:spcAft>
             </a:pPr>
             <a:r>
               <a:rPr sz="1400" b="0" i="0">
@@ -22356,14 +20461,7 @@
           </a:bodyPr>
           <a:lstStyle/>
           <a:p>
-            <a:pPr algn="l">
-              <a:spcBef>
-                <a:spcPts val="0"/>
-              </a:spcBef>
-              <a:spcAft>
-                <a:spcPts val="0"/>
-              </a:spcAft>
-            </a:pPr>
+            <a:pPr algn="l"/>
             <a:r>
               <a:rPr sz="850" b="0" i="0" spc="140">
                 <a:solidFill>
@@ -22463,14 +20561,7 @@
           </a:bodyPr>
           <a:lstStyle/>
           <a:p>
-            <a:pPr algn="l">
-              <a:spcBef>
-                <a:spcPts val="0"/>
-              </a:spcBef>
-              <a:spcAft>
-                <a:spcPts val="0"/>
-              </a:spcAft>
-            </a:pPr>
+            <a:pPr algn="l"/>
             <a:r>
               <a:rPr sz="850" b="0" i="0" spc="150">
                 <a:solidFill>
@@ -22505,14 +20596,7 @@
           </a:bodyPr>
           <a:lstStyle/>
           <a:p>
-            <a:pPr algn="r">
-              <a:spcBef>
-                <a:spcPts val="0"/>
-              </a:spcBef>
-              <a:spcAft>
-                <a:spcPts val="0"/>
-              </a:spcAft>
-            </a:pPr>
+            <a:pPr algn="r"/>
             <a:r>
               <a:rPr sz="850" b="0" i="0" spc="150">
                 <a:solidFill>
@@ -22551,12 +20635,6 @@
               <a:lnSpc>
                 <a:spcPct val="105000"/>
               </a:lnSpc>
-              <a:spcBef>
-                <a:spcPts val="0"/>
-              </a:spcBef>
-              <a:spcAft>
-                <a:spcPts val="0"/>
-              </a:spcAft>
             </a:pPr>
             <a:r>
               <a:rPr sz="4000" b="0" i="0" spc="-60">
@@ -22610,14 +20688,7 @@
           </a:bodyPr>
           <a:lstStyle/>
           <a:p>
-            <a:pPr algn="l">
-              <a:spcBef>
-                <a:spcPts val="0"/>
-              </a:spcBef>
-              <a:spcAft>
-                <a:spcPts val="0"/>
-              </a:spcAft>
-            </a:pPr>
+            <a:pPr algn="l"/>
             <a:r>
               <a:rPr sz="850" b="0" i="0" spc="150">
                 <a:solidFill>
@@ -22692,12 +20763,6 @@
               <a:lnSpc>
                 <a:spcPct val="144000"/>
               </a:lnSpc>
-              <a:spcBef>
-                <a:spcPts val="0"/>
-              </a:spcBef>
-              <a:spcAft>
-                <a:spcPts val="0"/>
-              </a:spcAft>
             </a:pPr>
             <a:r>
               <a:rPr sz="1450" b="0" i="0">
@@ -22762,14 +20827,7 @@
           </a:bodyPr>
           <a:lstStyle/>
           <a:p>
-            <a:pPr algn="l">
-              <a:spcBef>
-                <a:spcPts val="0"/>
-              </a:spcBef>
-              <a:spcAft>
-                <a:spcPts val="0"/>
-              </a:spcAft>
-            </a:pPr>
+            <a:pPr algn="l"/>
             <a:r>
               <a:rPr sz="15000" b="0" i="0" spc="-600">
                 <a:ln w="20000">
@@ -22845,14 +20903,7 @@
           </a:bodyPr>
           <a:lstStyle/>
           <a:p>
-            <a:pPr algn="l">
-              <a:spcBef>
-                <a:spcPts val="0"/>
-              </a:spcBef>
-              <a:spcAft>
-                <a:spcPts val="0"/>
-              </a:spcAft>
-            </a:pPr>
+            <a:pPr algn="l"/>
             <a:r>
               <a:rPr sz="850" b="0" i="0" spc="150">
                 <a:solidFill>
@@ -22891,12 +20942,6 @@
               <a:lnSpc>
                 <a:spcPct val="103000"/>
               </a:lnSpc>
-              <a:spcBef>
-                <a:spcPts val="0"/>
-              </a:spcBef>
-              <a:spcAft>
-                <a:spcPts val="0"/>
-              </a:spcAft>
             </a:pPr>
             <a:r>
               <a:rPr sz="4000" b="0" i="0" spc="-60">
@@ -22936,12 +20981,6 @@
               <a:lnSpc>
                 <a:spcPct val="135000"/>
               </a:lnSpc>
-              <a:spcBef>
-                <a:spcPts val="0"/>
-              </a:spcBef>
-              <a:spcAft>
-                <a:spcPts val="0"/>
-              </a:spcAft>
             </a:pPr>
             <a:r>
               <a:rPr sz="1250" b="0" i="0">
@@ -22977,14 +21016,7 @@
           </a:bodyPr>
           <a:lstStyle/>
           <a:p>
-            <a:pPr algn="r">
-              <a:spcBef>
-                <a:spcPts val="0"/>
-              </a:spcBef>
-              <a:spcAft>
-                <a:spcPts val="0"/>
-              </a:spcAft>
-            </a:pPr>
+            <a:pPr algn="r"/>
             <a:r>
               <a:rPr sz="850" b="0" i="0" spc="150">
                 <a:solidFill>
@@ -23048,14 +21080,7 @@
           </a:bodyPr>
           <a:lstStyle/>
           <a:p>
-            <a:pPr algn="l">
-              <a:spcBef>
-                <a:spcPts val="0"/>
-              </a:spcBef>
-              <a:spcAft>
-                <a:spcPts val="0"/>
-              </a:spcAft>
-            </a:pPr>
+            <a:pPr algn="l"/>
             <a:r>
               <a:rPr sz="850" b="0" i="0" spc="150">
                 <a:solidFill>
@@ -23090,14 +21115,7 @@
           </a:bodyPr>
           <a:lstStyle/>
           <a:p>
-            <a:pPr algn="r">
-              <a:spcBef>
-                <a:spcPts val="0"/>
-              </a:spcBef>
-              <a:spcAft>
-                <a:spcPts val="0"/>
-              </a:spcAft>
-            </a:pPr>
+            <a:pPr algn="r"/>
             <a:r>
               <a:rPr sz="850" b="0" i="0" spc="150">
                 <a:solidFill>
@@ -23136,12 +21154,6 @@
               <a:lnSpc>
                 <a:spcPct val="102000"/>
               </a:lnSpc>
-              <a:spcBef>
-                <a:spcPts val="0"/>
-              </a:spcBef>
-              <a:spcAft>
-                <a:spcPts val="0"/>
-              </a:spcAft>
             </a:pPr>
             <a:r>
               <a:rPr sz="2400" b="0" i="0" spc="-30">
@@ -23181,12 +21193,6 @@
               <a:lnSpc>
                 <a:spcPct val="142000"/>
               </a:lnSpc>
-              <a:spcBef>
-                <a:spcPts val="0"/>
-              </a:spcBef>
-              <a:spcAft>
-                <a:spcPts val="0"/>
-              </a:spcAft>
             </a:pPr>
             <a:r>
               <a:rPr sz="1150" b="0" i="0">
@@ -23258,14 +21264,7 @@
           </a:bodyPr>
           <a:lstStyle/>
           <a:p>
-            <a:pPr algn="l">
-              <a:spcBef>
-                <a:spcPts val="0"/>
-              </a:spcBef>
-              <a:spcAft>
-                <a:spcPts val="0"/>
-              </a:spcAft>
-            </a:pPr>
+            <a:pPr algn="l"/>
             <a:r>
               <a:rPr sz="850" b="0" i="0" spc="150">
                 <a:solidFill>
@@ -23304,12 +21303,6 @@
               <a:lnSpc>
                 <a:spcPct val="124000"/>
               </a:lnSpc>
-              <a:spcBef>
-                <a:spcPts val="0"/>
-              </a:spcBef>
-              <a:spcAft>
-                <a:spcPts val="0"/>
-              </a:spcAft>
             </a:pPr>
             <a:r>
               <a:rPr sz="1150" b="0" i="0">
@@ -23329,9 +21322,6 @@
               <a:spcBef>
                 <a:spcPts val="300"/>
               </a:spcBef>
-              <a:spcAft>
-                <a:spcPts val="0"/>
-              </a:spcAft>
             </a:pPr>
             <a:r>
               <a:rPr sz="750" b="0" i="0" spc="120">
@@ -23367,14 +21357,7 @@
           </a:bodyPr>
           <a:lstStyle/>
           <a:p>
-            <a:pPr algn="l">
-              <a:spcBef>
-                <a:spcPts val="0"/>
-              </a:spcBef>
-              <a:spcAft>
-                <a:spcPts val="0"/>
-              </a:spcAft>
-            </a:pPr>
+            <a:pPr algn="l"/>
             <a:r>
               <a:rPr sz="850" b="0" i="0" spc="150">
                 <a:solidFill>
@@ -23413,12 +21396,6 @@
               <a:lnSpc>
                 <a:spcPct val="124000"/>
               </a:lnSpc>
-              <a:spcBef>
-                <a:spcPts val="0"/>
-              </a:spcBef>
-              <a:spcAft>
-                <a:spcPts val="0"/>
-              </a:spcAft>
             </a:pPr>
             <a:r>
               <a:rPr sz="1150" b="0" i="0">
@@ -23438,9 +21415,6 @@
               <a:spcBef>
                 <a:spcPts val="300"/>
               </a:spcBef>
-              <a:spcAft>
-                <a:spcPts val="0"/>
-              </a:spcAft>
             </a:pPr>
             <a:r>
               <a:rPr sz="750" b="0" i="0" spc="120">
@@ -23476,14 +21450,7 @@
           </a:bodyPr>
           <a:lstStyle/>
           <a:p>
-            <a:pPr algn="l">
-              <a:spcBef>
-                <a:spcPts val="0"/>
-              </a:spcBef>
-              <a:spcAft>
-                <a:spcPts val="0"/>
-              </a:spcAft>
-            </a:pPr>
+            <a:pPr algn="l"/>
             <a:r>
               <a:rPr sz="850" b="0" i="0" spc="150">
                 <a:solidFill>
@@ -23522,12 +21489,6 @@
               <a:lnSpc>
                 <a:spcPct val="124000"/>
               </a:lnSpc>
-              <a:spcBef>
-                <a:spcPts val="0"/>
-              </a:spcBef>
-              <a:spcAft>
-                <a:spcPts val="0"/>
-              </a:spcAft>
             </a:pPr>
             <a:r>
               <a:rPr sz="1150" b="0" i="0">
@@ -23547,9 +21508,6 @@
               <a:spcBef>
                 <a:spcPts val="300"/>
               </a:spcBef>
-              <a:spcAft>
-                <a:spcPts val="0"/>
-              </a:spcAft>
             </a:pPr>
             <a:r>
               <a:rPr sz="750" b="0" i="0" spc="120">
@@ -23585,14 +21543,7 @@
           </a:bodyPr>
           <a:lstStyle/>
           <a:p>
-            <a:pPr algn="l">
-              <a:spcBef>
-                <a:spcPts val="0"/>
-              </a:spcBef>
-              <a:spcAft>
-                <a:spcPts val="0"/>
-              </a:spcAft>
-            </a:pPr>
+            <a:pPr algn="l"/>
             <a:r>
               <a:rPr sz="850" b="0" i="0" spc="150">
                 <a:solidFill>
@@ -23631,12 +21582,6 @@
               <a:lnSpc>
                 <a:spcPct val="124000"/>
               </a:lnSpc>
-              <a:spcBef>
-                <a:spcPts val="0"/>
-              </a:spcBef>
-              <a:spcAft>
-                <a:spcPts val="0"/>
-              </a:spcAft>
             </a:pPr>
             <a:r>
               <a:rPr sz="1150" b="0" i="0">
@@ -23656,9 +21601,6 @@
               <a:spcBef>
                 <a:spcPts val="300"/>
               </a:spcBef>
-              <a:spcAft>
-                <a:spcPts val="0"/>
-              </a:spcAft>
             </a:pPr>
             <a:r>
               <a:rPr sz="750" b="0" i="0" spc="120">
@@ -23694,14 +21636,7 @@
           </a:bodyPr>
           <a:lstStyle/>
           <a:p>
-            <a:pPr algn="l">
-              <a:spcBef>
-                <a:spcPts val="0"/>
-              </a:spcBef>
-              <a:spcAft>
-                <a:spcPts val="0"/>
-              </a:spcAft>
-            </a:pPr>
+            <a:pPr algn="l"/>
             <a:r>
               <a:rPr sz="850" b="0" i="0" spc="150">
                 <a:solidFill>
@@ -23740,12 +21675,6 @@
               <a:lnSpc>
                 <a:spcPct val="124000"/>
               </a:lnSpc>
-              <a:spcBef>
-                <a:spcPts val="0"/>
-              </a:spcBef>
-              <a:spcAft>
-                <a:spcPts val="0"/>
-              </a:spcAft>
             </a:pPr>
             <a:r>
               <a:rPr sz="1150" b="0" i="0">
@@ -23765,9 +21694,6 @@
               <a:spcBef>
                 <a:spcPts val="300"/>
               </a:spcBef>
-              <a:spcAft>
-                <a:spcPts val="0"/>
-              </a:spcAft>
             </a:pPr>
             <a:r>
               <a:rPr sz="750" b="0" i="0" spc="120">
@@ -23803,14 +21729,7 @@
           </a:bodyPr>
           <a:lstStyle/>
           <a:p>
-            <a:pPr algn="l">
-              <a:spcBef>
-                <a:spcPts val="0"/>
-              </a:spcBef>
-              <a:spcAft>
-                <a:spcPts val="0"/>
-              </a:spcAft>
-            </a:pPr>
+            <a:pPr algn="l"/>
             <a:r>
               <a:rPr sz="850" b="0" i="0" spc="150">
                 <a:solidFill>
@@ -23849,12 +21768,6 @@
               <a:lnSpc>
                 <a:spcPct val="124000"/>
               </a:lnSpc>
-              <a:spcBef>
-                <a:spcPts val="0"/>
-              </a:spcBef>
-              <a:spcAft>
-                <a:spcPts val="0"/>
-              </a:spcAft>
             </a:pPr>
             <a:r>
               <a:rPr sz="1150" b="0" i="0">
@@ -23874,9 +21787,6 @@
               <a:spcBef>
                 <a:spcPts val="300"/>
               </a:spcBef>
-              <a:spcAft>
-                <a:spcPts val="0"/>
-              </a:spcAft>
             </a:pPr>
             <a:r>
               <a:rPr sz="750" b="0" i="0" spc="120">
@@ -23912,14 +21822,7 @@
           </a:bodyPr>
           <a:lstStyle/>
           <a:p>
-            <a:pPr algn="l">
-              <a:spcBef>
-                <a:spcPts val="0"/>
-              </a:spcBef>
-              <a:spcAft>
-                <a:spcPts val="0"/>
-              </a:spcAft>
-            </a:pPr>
+            <a:pPr algn="l"/>
             <a:r>
               <a:rPr sz="850" b="0" i="0" spc="140">
                 <a:solidFill>
@@ -23983,14 +21886,7 @@
           </a:bodyPr>
           <a:lstStyle/>
           <a:p>
-            <a:pPr algn="l">
-              <a:spcBef>
-                <a:spcPts val="0"/>
-              </a:spcBef>
-              <a:spcAft>
-                <a:spcPts val="0"/>
-              </a:spcAft>
-            </a:pPr>
+            <a:pPr algn="l"/>
             <a:r>
               <a:rPr sz="850" b="0" i="0" spc="150">
                 <a:solidFill>
@@ -24025,14 +21921,7 @@
           </a:bodyPr>
           <a:lstStyle/>
           <a:p>
-            <a:pPr algn="r">
-              <a:spcBef>
-                <a:spcPts val="0"/>
-              </a:spcBef>
-              <a:spcAft>
-                <a:spcPts val="0"/>
-              </a:spcAft>
-            </a:pPr>
+            <a:pPr algn="r"/>
             <a:r>
               <a:rPr sz="850" b="0" i="0" spc="150">
                 <a:solidFill>
@@ -24071,12 +21960,6 @@
               <a:lnSpc>
                 <a:spcPct val="102000"/>
               </a:lnSpc>
-              <a:spcBef>
-                <a:spcPts val="0"/>
-              </a:spcBef>
-              <a:spcAft>
-                <a:spcPts val="0"/>
-              </a:spcAft>
             </a:pPr>
             <a:r>
               <a:rPr sz="2400" b="0" i="0" spc="-30">
@@ -24156,14 +22039,7 @@
           </a:bodyPr>
           <a:lstStyle/>
           <a:p>
-            <a:pPr algn="l">
-              <a:spcBef>
-                <a:spcPts val="0"/>
-              </a:spcBef>
-              <a:spcAft>
-                <a:spcPts val="0"/>
-              </a:spcAft>
-            </a:pPr>
+            <a:pPr algn="l"/>
             <a:r>
               <a:rPr sz="900" b="0" i="0" spc="150">
                 <a:solidFill>
@@ -24202,12 +22078,6 @@
               <a:lnSpc>
                 <a:spcPct val="136000"/>
               </a:lnSpc>
-              <a:spcBef>
-                <a:spcPts val="0"/>
-              </a:spcBef>
-              <a:spcAft>
-                <a:spcPts val="0"/>
-              </a:spcAft>
             </a:pPr>
             <a:r>
               <a:rPr sz="1100" b="0" i="0">
@@ -24236,9 +22106,6 @@
               <a:spcBef>
                 <a:spcPts val="1000"/>
               </a:spcBef>
-              <a:spcAft>
-                <a:spcPts val="0"/>
-              </a:spcAft>
             </a:pPr>
             <a:r>
               <a:rPr sz="1100" b="0" i="0">
@@ -24327,14 +22194,7 @@
           </a:bodyPr>
           <a:lstStyle/>
           <a:p>
-            <a:pPr algn="l">
-              <a:spcBef>
-                <a:spcPts val="0"/>
-              </a:spcBef>
-              <a:spcAft>
-                <a:spcPts val="0"/>
-              </a:spcAft>
-            </a:pPr>
+            <a:pPr algn="l"/>
             <a:r>
               <a:rPr sz="900" b="0" i="0" spc="150">
                 <a:solidFill>
@@ -24373,12 +22233,6 @@
               <a:lnSpc>
                 <a:spcPct val="136000"/>
               </a:lnSpc>
-              <a:spcBef>
-                <a:spcPts val="0"/>
-              </a:spcBef>
-              <a:spcAft>
-                <a:spcPts val="0"/>
-              </a:spcAft>
             </a:pPr>
             <a:r>
               <a:rPr sz="1100" b="0" i="0">
@@ -24407,9 +22261,6 @@
               <a:spcBef>
                 <a:spcPts val="1000"/>
               </a:spcBef>
-              <a:spcAft>
-                <a:spcPts val="0"/>
-              </a:spcAft>
             </a:pPr>
             <a:r>
               <a:rPr sz="1100" b="0" i="0">
@@ -24498,14 +22349,7 @@
           </a:bodyPr>
           <a:lstStyle/>
           <a:p>
-            <a:pPr algn="l">
-              <a:spcBef>
-                <a:spcPts val="0"/>
-              </a:spcBef>
-              <a:spcAft>
-                <a:spcPts val="0"/>
-              </a:spcAft>
-            </a:pPr>
+            <a:pPr algn="l"/>
             <a:r>
               <a:rPr sz="900" b="0" i="0" spc="150">
                 <a:solidFill>
@@ -24544,12 +22388,6 @@
               <a:lnSpc>
                 <a:spcPct val="136000"/>
               </a:lnSpc>
-              <a:spcBef>
-                <a:spcPts val="0"/>
-              </a:spcBef>
-              <a:spcAft>
-                <a:spcPts val="0"/>
-              </a:spcAft>
             </a:pPr>
             <a:r>
               <a:rPr sz="1100" b="0" i="0">
@@ -24578,9 +22416,6 @@
               <a:spcBef>
                 <a:spcPts val="1000"/>
               </a:spcBef>
-              <a:spcAft>
-                <a:spcPts val="0"/>
-              </a:spcAft>
             </a:pPr>
             <a:r>
               <a:rPr sz="1100" b="0" i="0">
@@ -24661,14 +22496,7 @@
           </a:bodyPr>
           <a:lstStyle/>
           <a:p>
-            <a:pPr algn="l">
-              <a:spcBef>
-                <a:spcPts val="0"/>
-              </a:spcBef>
-              <a:spcAft>
-                <a:spcPts val="0"/>
-              </a:spcAft>
-            </a:pPr>
+            <a:pPr algn="l"/>
             <a:r>
               <a:rPr sz="850" b="0" i="0" spc="140">
                 <a:solidFill>
@@ -24687,9 +22515,6 @@
               <a:spcBef>
                 <a:spcPts val="400"/>
               </a:spcBef>
-              <a:spcAft>
-                <a:spcPts val="0"/>
-              </a:spcAft>
             </a:pPr>
             <a:r>
               <a:rPr sz="1300" b="0" i="0">
@@ -24754,14 +22579,7 @@
           </a:bodyPr>
           <a:lstStyle/>
           <a:p>
-            <a:pPr algn="l">
-              <a:spcBef>
-                <a:spcPts val="0"/>
-              </a:spcBef>
-              <a:spcAft>
-                <a:spcPts val="0"/>
-              </a:spcAft>
-            </a:pPr>
+            <a:pPr algn="l"/>
             <a:r>
               <a:rPr sz="15000" b="0" i="0" spc="-600">
                 <a:ln w="20000">
@@ -24837,14 +22655,7 @@
           </a:bodyPr>
           <a:lstStyle/>
           <a:p>
-            <a:pPr algn="l">
-              <a:spcBef>
-                <a:spcPts val="0"/>
-              </a:spcBef>
-              <a:spcAft>
-                <a:spcPts val="0"/>
-              </a:spcAft>
-            </a:pPr>
+            <a:pPr algn="l"/>
             <a:r>
               <a:rPr sz="850" b="0" i="0" spc="150">
                 <a:solidFill>
@@ -24883,12 +22694,6 @@
               <a:lnSpc>
                 <a:spcPct val="103000"/>
               </a:lnSpc>
-              <a:spcBef>
-                <a:spcPts val="0"/>
-              </a:spcBef>
-              <a:spcAft>
-                <a:spcPts val="0"/>
-              </a:spcAft>
             </a:pPr>
             <a:r>
               <a:rPr sz="4000" b="0" i="0" spc="-60">
@@ -24928,12 +22733,6 @@
               <a:lnSpc>
                 <a:spcPct val="135000"/>
               </a:lnSpc>
-              <a:spcBef>
-                <a:spcPts val="0"/>
-              </a:spcBef>
-              <a:spcAft>
-                <a:spcPts val="0"/>
-              </a:spcAft>
             </a:pPr>
             <a:r>
               <a:rPr sz="1250" b="0" i="0">
@@ -24969,14 +22768,7 @@
           </a:bodyPr>
           <a:lstStyle/>
           <a:p>
-            <a:pPr algn="r">
-              <a:spcBef>
-                <a:spcPts val="0"/>
-              </a:spcBef>
-              <a:spcAft>
-                <a:spcPts val="0"/>
-              </a:spcAft>
-            </a:pPr>
+            <a:pPr algn="r"/>
             <a:r>
               <a:rPr sz="850" b="0" i="0" spc="150">
                 <a:solidFill>
@@ -25040,14 +22832,7 @@
           </a:bodyPr>
           <a:lstStyle/>
           <a:p>
-            <a:pPr algn="l">
-              <a:spcBef>
-                <a:spcPts val="0"/>
-              </a:spcBef>
-              <a:spcAft>
-                <a:spcPts val="0"/>
-              </a:spcAft>
-            </a:pPr>
+            <a:pPr algn="l"/>
             <a:r>
               <a:rPr sz="850" b="0" i="0" spc="150">
                 <a:solidFill>
@@ -25082,14 +22867,7 @@
           </a:bodyPr>
           <a:lstStyle/>
           <a:p>
-            <a:pPr algn="r">
-              <a:spcBef>
-                <a:spcPts val="0"/>
-              </a:spcBef>
-              <a:spcAft>
-                <a:spcPts val="0"/>
-              </a:spcAft>
-            </a:pPr>
+            <a:pPr algn="r"/>
             <a:r>
               <a:rPr sz="850" b="0" i="0" spc="150">
                 <a:solidFill>
@@ -25128,12 +22906,6 @@
               <a:lnSpc>
                 <a:spcPct val="102000"/>
               </a:lnSpc>
-              <a:spcBef>
-                <a:spcPts val="0"/>
-              </a:spcBef>
-              <a:spcAft>
-                <a:spcPts val="0"/>
-              </a:spcAft>
             </a:pPr>
             <a:r>
               <a:rPr sz="2600" b="0" i="0" spc="-30">
@@ -25173,12 +22945,6 @@
               <a:lnSpc>
                 <a:spcPct val="142000"/>
               </a:lnSpc>
-              <a:spcBef>
-                <a:spcPts val="0"/>
-              </a:spcBef>
-              <a:spcAft>
-                <a:spcPts val="0"/>
-              </a:spcAft>
             </a:pPr>
             <a:r>
               <a:rPr sz="1150" b="0" i="0">
@@ -25218,12 +22984,6 @@
               <a:lnSpc>
                 <a:spcPct val="142000"/>
               </a:lnSpc>
-              <a:spcBef>
-                <a:spcPts val="0"/>
-              </a:spcBef>
-              <a:spcAft>
-                <a:spcPts val="0"/>
-              </a:spcAft>
             </a:pPr>
             <a:r>
               <a:rPr sz="1150" b="0" i="0">
@@ -25295,18 +23055,11 @@
           </a:bodyPr>
           <a:lstStyle/>
           <a:p>
-            <a:pPr algn="l">
-              <a:spcBef>
-                <a:spcPts val="0"/>
-              </a:spcBef>
-              <a:spcAft>
-                <a:spcPts val="0"/>
-              </a:spcAft>
-            </a:pPr>
+            <a:pPr algn="l"/>
             <a:r>
               <a:rPr sz="850" b="0" i="0" spc="140">
                 <a:solidFill>
-                  <a:srgbClr val="A8102F"/>
+                  <a:srgbClr val="5B5347"/>
                 </a:solidFill>
                 <a:latin typeface="Consolas"/>
               </a:rPr>
@@ -25321,14 +23074,11 @@
               <a:spcBef>
                 <a:spcPts val="400"/>
               </a:spcBef>
-              <a:spcAft>
-                <a:spcPts val="0"/>
-              </a:spcAft>
             </a:pPr>
             <a:r>
               <a:rPr sz="1100" b="0" i="0">
                 <a:solidFill>
-                  <a:srgbClr val="5B5347"/>
+                  <a:srgbClr val="16130F"/>
                 </a:solidFill>
                 <a:latin typeface="Georgia"/>
               </a:rPr>
@@ -25395,14 +23145,7 @@
           </a:bodyPr>
           <a:lstStyle/>
           <a:p>
-            <a:pPr algn="l">
-              <a:spcBef>
-                <a:spcPts val="0"/>
-              </a:spcBef>
-              <a:spcAft>
-                <a:spcPts val="0"/>
-              </a:spcAft>
-            </a:pPr>
+            <a:pPr algn="l"/>
             <a:r>
               <a:rPr sz="1050" b="0" i="0">
                 <a:solidFill>
@@ -25437,14 +23180,7 @@
           </a:bodyPr>
           <a:lstStyle/>
           <a:p>
-            <a:pPr algn="r">
-              <a:spcBef>
-                <a:spcPts val="0"/>
-              </a:spcBef>
-              <a:spcAft>
-                <a:spcPts val="0"/>
-              </a:spcAft>
-            </a:pPr>
+            <a:pPr algn="r"/>
             <a:r>
               <a:rPr sz="1100" b="0" i="0">
                 <a:solidFill>
@@ -25515,14 +23251,7 @@
           </a:bodyPr>
           <a:lstStyle/>
           <a:p>
-            <a:pPr algn="l">
-              <a:spcBef>
-                <a:spcPts val="0"/>
-              </a:spcBef>
-              <a:spcAft>
-                <a:spcPts val="0"/>
-              </a:spcAft>
-            </a:pPr>
+            <a:pPr algn="l"/>
             <a:r>
               <a:rPr sz="1050" b="0" i="0">
                 <a:solidFill>
@@ -25557,14 +23286,7 @@
           </a:bodyPr>
           <a:lstStyle/>
           <a:p>
-            <a:pPr algn="r">
-              <a:spcBef>
-                <a:spcPts val="0"/>
-              </a:spcBef>
-              <a:spcAft>
-                <a:spcPts val="0"/>
-              </a:spcAft>
-            </a:pPr>
+            <a:pPr algn="r"/>
             <a:r>
               <a:rPr sz="1100" b="0" i="0">
                 <a:solidFill>
@@ -25635,14 +23357,7 @@
           </a:bodyPr>
           <a:lstStyle/>
           <a:p>
-            <a:pPr algn="l">
-              <a:spcBef>
-                <a:spcPts val="0"/>
-              </a:spcBef>
-              <a:spcAft>
-                <a:spcPts val="0"/>
-              </a:spcAft>
-            </a:pPr>
+            <a:pPr algn="l"/>
             <a:r>
               <a:rPr sz="1050" b="0" i="0">
                 <a:solidFill>
@@ -25677,14 +23392,7 @@
           </a:bodyPr>
           <a:lstStyle/>
           <a:p>
-            <a:pPr algn="r">
-              <a:spcBef>
-                <a:spcPts val="0"/>
-              </a:spcBef>
-              <a:spcAft>
-                <a:spcPts val="0"/>
-              </a:spcAft>
-            </a:pPr>
+            <a:pPr algn="r"/>
             <a:r>
               <a:rPr sz="1100" b="0" i="0">
                 <a:solidFill>
@@ -25755,14 +23463,7 @@
           </a:bodyPr>
           <a:lstStyle/>
           <a:p>
-            <a:pPr algn="l">
-              <a:spcBef>
-                <a:spcPts val="0"/>
-              </a:spcBef>
-              <a:spcAft>
-                <a:spcPts val="0"/>
-              </a:spcAft>
-            </a:pPr>
+            <a:pPr algn="l"/>
             <a:r>
               <a:rPr sz="1050" b="0" i="0">
                 <a:solidFill>
@@ -25797,14 +23498,7 @@
           </a:bodyPr>
           <a:lstStyle/>
           <a:p>
-            <a:pPr algn="r">
-              <a:spcBef>
-                <a:spcPts val="0"/>
-              </a:spcBef>
-              <a:spcAft>
-                <a:spcPts val="0"/>
-              </a:spcAft>
-            </a:pPr>
+            <a:pPr algn="r"/>
             <a:r>
               <a:rPr sz="1100" b="0" i="0">
                 <a:solidFill>
@@ -25875,14 +23569,7 @@
           </a:bodyPr>
           <a:lstStyle/>
           <a:p>
-            <a:pPr algn="l">
-              <a:spcBef>
-                <a:spcPts val="0"/>
-              </a:spcBef>
-              <a:spcAft>
-                <a:spcPts val="0"/>
-              </a:spcAft>
-            </a:pPr>
+            <a:pPr algn="l"/>
             <a:r>
               <a:rPr sz="1050" b="0" i="0">
                 <a:solidFill>
@@ -25917,14 +23604,7 @@
           </a:bodyPr>
           <a:lstStyle/>
           <a:p>
-            <a:pPr algn="r">
-              <a:spcBef>
-                <a:spcPts val="0"/>
-              </a:spcBef>
-              <a:spcAft>
-                <a:spcPts val="0"/>
-              </a:spcAft>
-            </a:pPr>
+            <a:pPr algn="r"/>
             <a:r>
               <a:rPr sz="1100" b="0" i="0">
                 <a:solidFill>
@@ -25995,14 +23675,7 @@
           </a:bodyPr>
           <a:lstStyle/>
           <a:p>
-            <a:pPr algn="l">
-              <a:spcBef>
-                <a:spcPts val="0"/>
-              </a:spcBef>
-              <a:spcAft>
-                <a:spcPts val="0"/>
-              </a:spcAft>
-            </a:pPr>
+            <a:pPr algn="l"/>
             <a:r>
               <a:rPr sz="1050" b="0" i="0">
                 <a:solidFill>
@@ -26037,14 +23710,7 @@
           </a:bodyPr>
           <a:lstStyle/>
           <a:p>
-            <a:pPr algn="r">
-              <a:spcBef>
-                <a:spcPts val="0"/>
-              </a:spcBef>
-              <a:spcAft>
-                <a:spcPts val="0"/>
-              </a:spcAft>
-            </a:pPr>
+            <a:pPr algn="r"/>
             <a:r>
               <a:rPr sz="1100" b="0" i="0">
                 <a:solidFill>
@@ -26115,14 +23781,7 @@
           </a:bodyPr>
           <a:lstStyle/>
           <a:p>
-            <a:pPr algn="l">
-              <a:spcBef>
-                <a:spcPts val="0"/>
-              </a:spcBef>
-              <a:spcAft>
-                <a:spcPts val="0"/>
-              </a:spcAft>
-            </a:pPr>
+            <a:pPr algn="l"/>
             <a:r>
               <a:rPr sz="850" b="0" i="0" spc="140">
                 <a:solidFill>
@@ -26186,14 +23845,7 @@
           </a:bodyPr>
           <a:lstStyle/>
           <a:p>
-            <a:pPr algn="l">
-              <a:spcBef>
-                <a:spcPts val="0"/>
-              </a:spcBef>
-              <a:spcAft>
-                <a:spcPts val="0"/>
-              </a:spcAft>
-            </a:pPr>
+            <a:pPr algn="l"/>
             <a:r>
               <a:rPr sz="15000" b="0" i="0" spc="-600">
                 <a:ln w="20000">
@@ -26269,14 +23921,7 @@
           </a:bodyPr>
           <a:lstStyle/>
           <a:p>
-            <a:pPr algn="l">
-              <a:spcBef>
-                <a:spcPts val="0"/>
-              </a:spcBef>
-              <a:spcAft>
-                <a:spcPts val="0"/>
-              </a:spcAft>
-            </a:pPr>
+            <a:pPr algn="l"/>
             <a:r>
               <a:rPr sz="850" b="0" i="0" spc="150">
                 <a:solidFill>
@@ -26315,12 +23960,6 @@
               <a:lnSpc>
                 <a:spcPct val="103000"/>
               </a:lnSpc>
-              <a:spcBef>
-                <a:spcPts val="0"/>
-              </a:spcBef>
-              <a:spcAft>
-                <a:spcPts val="0"/>
-              </a:spcAft>
             </a:pPr>
             <a:r>
               <a:rPr sz="4000" b="0" i="0" spc="-60">
@@ -26360,12 +23999,6 @@
               <a:lnSpc>
                 <a:spcPct val="135000"/>
               </a:lnSpc>
-              <a:spcBef>
-                <a:spcPts val="0"/>
-              </a:spcBef>
-              <a:spcAft>
-                <a:spcPts val="0"/>
-              </a:spcAft>
             </a:pPr>
             <a:r>
               <a:rPr sz="1250" b="0" i="0">
@@ -26401,14 +24034,7 @@
           </a:bodyPr>
           <a:lstStyle/>
           <a:p>
-            <a:pPr algn="r">
-              <a:spcBef>
-                <a:spcPts val="0"/>
-              </a:spcBef>
-              <a:spcAft>
-                <a:spcPts val="0"/>
-              </a:spcAft>
-            </a:pPr>
+            <a:pPr algn="r"/>
             <a:r>
               <a:rPr sz="850" b="0" i="0" spc="150">
                 <a:solidFill>
